--- a/RAC/18장/18장_노드추가와삭제.pptx
+++ b/RAC/18장/18장_노드추가와삭제.pptx
@@ -4,54 +4,57 @@
   <p:sldMasterIdLst>
     <p:sldMasterId id="2147483648" r:id="rId1"/>
   </p:sldMasterIdLst>
+  <p:notesMasterIdLst>
+    <p:notesMasterId r:id="rId47"/>
+  </p:notesMasterIdLst>
   <p:sldIdLst>
-    <p:sldId id="256" r:id="rId7"/>
-    <p:sldId id="257" r:id="rId8"/>
-    <p:sldId id="258" r:id="rId9"/>
-    <p:sldId id="259" r:id="rId10"/>
-    <p:sldId id="260" r:id="rId12"/>
-    <p:sldId id="261" r:id="rId13"/>
-    <p:sldId id="262" r:id="rId14"/>
-    <p:sldId id="263" r:id="rId15"/>
-    <p:sldId id="264" r:id="rId16"/>
-    <p:sldId id="265" r:id="rId17"/>
-    <p:sldId id="266" r:id="rId18"/>
-    <p:sldId id="267" r:id="rId19"/>
-    <p:sldId id="268" r:id="rId20"/>
-    <p:sldId id="269" r:id="rId21"/>
-    <p:sldId id="270" r:id="rId22"/>
-    <p:sldId id="271" r:id="rId23"/>
-    <p:sldId id="272" r:id="rId24"/>
-    <p:sldId id="273" r:id="rId25"/>
-    <p:sldId id="274" r:id="rId26"/>
-    <p:sldId id="275" r:id="rId27"/>
-    <p:sldId id="276" r:id="rId28"/>
-    <p:sldId id="277" r:id="rId29"/>
-    <p:sldId id="278" r:id="rId30"/>
-    <p:sldId id="279" r:id="rId31"/>
-    <p:sldId id="280" r:id="rId32"/>
-    <p:sldId id="281" r:id="rId33"/>
-    <p:sldId id="282" r:id="rId34"/>
-    <p:sldId id="283" r:id="rId35"/>
-    <p:sldId id="284" r:id="rId36"/>
-    <p:sldId id="285" r:id="rId37"/>
-    <p:sldId id="286" r:id="rId38"/>
-    <p:sldId id="287" r:id="rId39"/>
-    <p:sldId id="288" r:id="rId40"/>
-    <p:sldId id="289" r:id="rId41"/>
-    <p:sldId id="290" r:id="rId42"/>
-    <p:sldId id="291" r:id="rId43"/>
-    <p:sldId id="292" r:id="rId44"/>
-    <p:sldId id="293" r:id="rId45"/>
-    <p:sldId id="294" r:id="rId46"/>
-    <p:sldId id="295" r:id="rId47"/>
-    <p:sldId id="296" r:id="rId48"/>
-    <p:sldId id="297" r:id="rId49"/>
-    <p:sldId id="298" r:id="rId50"/>
-    <p:sldId id="299" r:id="rId51"/>
-    <p:sldId id="300" r:id="rId52"/>
+    <p:sldId id="256" r:id="rId2"/>
+    <p:sldId id="257" r:id="rId3"/>
+    <p:sldId id="258" r:id="rId4"/>
+    <p:sldId id="259" r:id="rId5"/>
+    <p:sldId id="260" r:id="rId6"/>
+    <p:sldId id="261" r:id="rId7"/>
+    <p:sldId id="262" r:id="rId8"/>
+    <p:sldId id="263" r:id="rId9"/>
+    <p:sldId id="264" r:id="rId10"/>
+    <p:sldId id="265" r:id="rId11"/>
+    <p:sldId id="266" r:id="rId12"/>
+    <p:sldId id="267" r:id="rId13"/>
+    <p:sldId id="268" r:id="rId14"/>
+    <p:sldId id="269" r:id="rId15"/>
+    <p:sldId id="270" r:id="rId16"/>
+    <p:sldId id="271" r:id="rId17"/>
+    <p:sldId id="272" r:id="rId18"/>
+    <p:sldId id="273" r:id="rId19"/>
+    <p:sldId id="274" r:id="rId20"/>
+    <p:sldId id="275" r:id="rId21"/>
+    <p:sldId id="276" r:id="rId22"/>
+    <p:sldId id="277" r:id="rId23"/>
+    <p:sldId id="278" r:id="rId24"/>
+    <p:sldId id="279" r:id="rId25"/>
+    <p:sldId id="280" r:id="rId26"/>
+    <p:sldId id="281" r:id="rId27"/>
+    <p:sldId id="282" r:id="rId28"/>
+    <p:sldId id="283" r:id="rId29"/>
+    <p:sldId id="284" r:id="rId30"/>
+    <p:sldId id="285" r:id="rId31"/>
+    <p:sldId id="286" r:id="rId32"/>
+    <p:sldId id="287" r:id="rId33"/>
+    <p:sldId id="288" r:id="rId34"/>
+    <p:sldId id="289" r:id="rId35"/>
+    <p:sldId id="290" r:id="rId36"/>
+    <p:sldId id="291" r:id="rId37"/>
+    <p:sldId id="292" r:id="rId38"/>
+    <p:sldId id="293" r:id="rId39"/>
+    <p:sldId id="294" r:id="rId40"/>
+    <p:sldId id="295" r:id="rId41"/>
+    <p:sldId id="296" r:id="rId42"/>
+    <p:sldId id="297" r:id="rId43"/>
+    <p:sldId id="298" r:id="rId44"/>
+    <p:sldId id="299" r:id="rId45"/>
+    <p:sldId id="300" r:id="rId46"/>
   </p:sldIdLst>
-  <p:sldSz cx="12191695" cy="6858000" type="screen4x3"/>
+  <p:sldSz cx="12192000" cy="6858000"/>
   <p:notesSz cx="6858000" cy="9144000"/>
   <p:defaultTextStyle>
     <a:defPPr>
@@ -148,11 +151,27 @@
       </a:defRPr>
     </a:lvl9pPr>
   </p:defaultTextStyle>
+  <p:extLst>
+    <p:ext uri="{EFAFB233-063F-42B5-8137-9DF3F51BA10A}">
+      <p15:sldGuideLst xmlns:p15="http://schemas.microsoft.com/office/powerpoint/2012/main">
+        <p15:guide id="1" orient="horz" pos="2160">
+          <p15:clr>
+            <a:srgbClr val="A4A3A4"/>
+          </p15:clr>
+        </p15:guide>
+        <p15:guide id="2" pos="2880">
+          <p15:clr>
+            <a:srgbClr val="A4A3A4"/>
+          </p15:clr>
+        </p15:guide>
+      </p15:sldGuideLst>
+    </p:ext>
+  </p:extLst>
 </p:presentation>
 </file>
 
 <file path=ppt/notesMasters/notesMaster1.xml><?xml version="1.0" encoding="utf-8"?>
-<p:notesMaster xmlns:a="http://schemas.openxmlformats.org/drawingml/2006/main" xmlns:p="http://schemas.openxmlformats.org/presentationml/2006/main" xmlns:r="http://schemas.openxmlformats.org/officeDocument/2006/relationships">
+<p:notesMaster xmlns:a="http://schemas.openxmlformats.org/drawingml/2006/main" xmlns:r="http://schemas.openxmlformats.org/officeDocument/2006/relationships" xmlns:p="http://schemas.openxmlformats.org/presentationml/2006/main">
   <p:cSld>
     <p:bg>
       <p:bgRef idx="1001">
@@ -175,7 +194,7 @@
       </p:grpSpPr>
       <p:sp>
         <p:nvSpPr>
-          <p:cNvPr id="2" name="Header Placeholder 1"/>
+          <p:cNvPr id="2" name="머리글 개체 틀 1"/>
           <p:cNvSpPr>
             <a:spLocks noGrp="1"/>
           </p:cNvSpPr>
@@ -186,7 +205,7 @@
         <p:spPr>
           <a:xfrm>
             <a:off x="0" y="0"/>
-            <a:ext cx="2971800" cy="457200"/>
+            <a:ext cx="2971800" cy="458788"/>
           </a:xfrm>
           <a:prstGeom prst="rect">
             <a:avLst/>
@@ -200,13 +219,13 @@
             </a:lvl1pPr>
           </a:lstStyle>
           <a:p>
-            <a:endParaRPr lang="en-US"/>
-          </a:p>
-        </p:txBody>
-      </p:sp>
-      <p:sp>
-        <p:nvSpPr>
-          <p:cNvPr id="3" name="Date Placeholder 2"/>
+            <a:endParaRPr lang="ko-KR" altLang="en-US"/>
+          </a:p>
+        </p:txBody>
+      </p:sp>
+      <p:sp>
+        <p:nvSpPr>
+          <p:cNvPr id="3" name="날짜 개체 틀 2"/>
           <p:cNvSpPr>
             <a:spLocks noGrp="1"/>
           </p:cNvSpPr>
@@ -217,7 +236,7 @@
         <p:spPr>
           <a:xfrm>
             <a:off x="3884613" y="0"/>
-            <a:ext cx="2971800" cy="457200"/>
+            <a:ext cx="2971800" cy="458788"/>
           </a:xfrm>
           <a:prstGeom prst="rect">
             <a:avLst/>
@@ -231,17 +250,17 @@
             </a:lvl1pPr>
           </a:lstStyle>
           <a:p>
-            <a:fld id="{0F89C1C7-3DCD-1040-A9CF-14679D8B5DDD}" type="datetimeFigureOut">
-              <a:rPr lang="en-US" smtClean="0"/>
-              <a:t>10/17/16</a:t>
+            <a:fld id="{A088B8FC-B919-4B0A-BA34-30E0B6898CA6}" type="datetimeFigureOut">
+              <a:rPr lang="ko-KR" altLang="en-US" smtClean="0"/>
+              <a:t>2026-10-29</a:t>
             </a:fld>
-            <a:endParaRPr lang="en-US"/>
-          </a:p>
-        </p:txBody>
-      </p:sp>
-      <p:sp>
-        <p:nvSpPr>
-          <p:cNvPr id="4" name="Slide Image Placeholder 3"/>
+            <a:endParaRPr lang="ko-KR" altLang="en-US"/>
+          </a:p>
+        </p:txBody>
+      </p:sp>
+      <p:sp>
+        <p:nvSpPr>
+          <p:cNvPr id="4" name="슬라이드 이미지 개체 틀 3"/>
           <p:cNvSpPr>
             <a:spLocks noGrp="1" noRot="1" noChangeAspect="1"/>
           </p:cNvSpPr>
@@ -251,8 +270,8 @@
         </p:nvSpPr>
         <p:spPr>
           <a:xfrm>
-            <a:off x="1143000" y="685800"/>
-            <a:ext cx="4572000" cy="3429000"/>
+            <a:off x="685800" y="1143000"/>
+            <a:ext cx="5486400" cy="3086100"/>
           </a:xfrm>
           <a:prstGeom prst="rect">
             <a:avLst/>
@@ -268,13 +287,13 @@
           <a:bodyPr vert="horz" lIns="91440" tIns="45720" rIns="91440" bIns="45720" rtlCol="0" anchor="ctr"/>
           <a:lstStyle/>
           <a:p>
-            <a:endParaRPr lang="en-US"/>
-          </a:p>
-        </p:txBody>
-      </p:sp>
-      <p:sp>
-        <p:nvSpPr>
-          <p:cNvPr id="5" name="Notes Placeholder 4"/>
+            <a:endParaRPr lang="ko-KR" altLang="en-US"/>
+          </a:p>
+        </p:txBody>
+      </p:sp>
+      <p:sp>
+        <p:nvSpPr>
+          <p:cNvPr id="5" name="슬라이드 노트 개체 틀 4"/>
           <p:cNvSpPr>
             <a:spLocks noGrp="1"/>
           </p:cNvSpPr>
@@ -284,8 +303,8 @@
         </p:nvSpPr>
         <p:spPr>
           <a:xfrm>
-            <a:off x="685800" y="4343400"/>
-            <a:ext cx="5486400" cy="4114800"/>
+            <a:off x="685800" y="4400550"/>
+            <a:ext cx="5486400" cy="3600450"/>
           </a:xfrm>
           <a:prstGeom prst="rect">
             <a:avLst/>
@@ -297,44 +316,43 @@
           <a:p>
             <a:pPr lvl="0"/>
             <a:r>
-              <a:rPr lang="en-US" smtClean="0"/>
-              <a:t>Click to edit Master text styles</a:t>
+              <a:rPr lang="ko-KR" altLang="en-US"/>
+              <a:t>마스터 텍스트 스타일을 편집하려면 클릭</a:t>
             </a:r>
           </a:p>
           <a:p>
             <a:pPr lvl="1"/>
             <a:r>
-              <a:rPr lang="en-US" smtClean="0"/>
-              <a:t>Second level</a:t>
+              <a:rPr lang="ko-KR" altLang="en-US"/>
+              <a:t>두 번째 수준</a:t>
             </a:r>
           </a:p>
           <a:p>
             <a:pPr lvl="2"/>
             <a:r>
-              <a:rPr lang="en-US" smtClean="0"/>
-              <a:t>Third level</a:t>
+              <a:rPr lang="ko-KR" altLang="en-US"/>
+              <a:t>세 번째 수준</a:t>
             </a:r>
           </a:p>
           <a:p>
             <a:pPr lvl="3"/>
             <a:r>
-              <a:rPr lang="en-US" smtClean="0"/>
-              <a:t>Fourth level</a:t>
+              <a:rPr lang="ko-KR" altLang="en-US"/>
+              <a:t>네 번째 수준</a:t>
             </a:r>
           </a:p>
           <a:p>
             <a:pPr lvl="4"/>
             <a:r>
-              <a:rPr lang="en-US" smtClean="0"/>
-              <a:t>Fifth level</a:t>
-            </a:r>
-            <a:endParaRPr lang="en-US"/>
-          </a:p>
-        </p:txBody>
-      </p:sp>
-      <p:sp>
-        <p:nvSpPr>
-          <p:cNvPr id="6" name="Footer Placeholder 5"/>
+              <a:rPr lang="ko-KR" altLang="en-US"/>
+              <a:t>다섯 번째 수준</a:t>
+            </a:r>
+          </a:p>
+        </p:txBody>
+      </p:sp>
+      <p:sp>
+        <p:nvSpPr>
+          <p:cNvPr id="6" name="바닥글 개체 틀 5"/>
           <p:cNvSpPr>
             <a:spLocks noGrp="1"/>
           </p:cNvSpPr>
@@ -345,7 +363,7 @@
         <p:spPr>
           <a:xfrm>
             <a:off x="0" y="8685213"/>
-            <a:ext cx="2971800" cy="457200"/>
+            <a:ext cx="2971800" cy="458787"/>
           </a:xfrm>
           <a:prstGeom prst="rect">
             <a:avLst/>
@@ -359,13 +377,13 @@
             </a:lvl1pPr>
           </a:lstStyle>
           <a:p>
-            <a:endParaRPr lang="en-US"/>
-          </a:p>
-        </p:txBody>
-      </p:sp>
-      <p:sp>
-        <p:nvSpPr>
-          <p:cNvPr id="7" name="Slide Number Placeholder 6"/>
+            <a:endParaRPr lang="ko-KR" altLang="en-US"/>
+          </a:p>
+        </p:txBody>
+      </p:sp>
+      <p:sp>
+        <p:nvSpPr>
+          <p:cNvPr id="7" name="슬라이드 번호 개체 틀 6"/>
           <p:cNvSpPr>
             <a:spLocks noGrp="1"/>
           </p:cNvSpPr>
@@ -376,7 +394,7 @@
         <p:spPr>
           <a:xfrm>
             <a:off x="3884613" y="8685213"/>
-            <a:ext cx="2971800" cy="457200"/>
+            <a:ext cx="2971800" cy="458787"/>
           </a:xfrm>
           <a:prstGeom prst="rect">
             <a:avLst/>
@@ -390,24 +408,24 @@
             </a:lvl1pPr>
           </a:lstStyle>
           <a:p>
-            <a:fld id="{BB5E49A5-4136-284D-997B-48E1D791AD67}" type="slidenum">
-              <a:rPr lang="en-US" smtClean="0"/>
+            <a:fld id="{BC36745C-FD0E-42CD-9BA1-A7C3EDC7807A}" type="slidenum">
+              <a:rPr lang="ko-KR" altLang="en-US" smtClean="0"/>
               <a:t>‹#›</a:t>
             </a:fld>
-            <a:endParaRPr lang="en-US"/>
+            <a:endParaRPr lang="ko-KR" altLang="en-US"/>
           </a:p>
         </p:txBody>
       </p:sp>
     </p:spTree>
     <p:extLst>
       <p:ext uri="{BB962C8B-B14F-4D97-AF65-F5344CB8AC3E}">
-        <p14:creationId xmlns:p14="http://schemas.microsoft.com/office/powerpoint/2010/main" val="2623252185"/>
+        <p14:creationId xmlns:p14="http://schemas.microsoft.com/office/powerpoint/2010/main" val="3187184881"/>
       </p:ext>
     </p:extLst>
   </p:cSld>
   <p:clrMap bg1="lt1" tx1="dk1" bg2="lt2" tx2="dk2" accent1="accent1" accent2="accent2" accent3="accent3" accent4="accent4" accent5="accent5" accent6="accent6" hlink="hlink" folHlink="folHlink"/>
   <p:notesStyle>
-    <a:lvl1pPr marL="0" algn="l" defTabSz="457200" rtl="0" eaLnBrk="1" latinLnBrk="0" hangingPunct="1">
+    <a:lvl1pPr marL="0" algn="l" defTabSz="914400" rtl="0" eaLnBrk="1" latinLnBrk="1" hangingPunct="1">
       <a:defRPr sz="1200" kern="1200">
         <a:solidFill>
           <a:schemeClr val="tx1"/>
@@ -417,7 +435,7 @@
         <a:cs typeface="+mn-cs"/>
       </a:defRPr>
     </a:lvl1pPr>
-    <a:lvl2pPr marL="457200" algn="l" defTabSz="457200" rtl="0" eaLnBrk="1" latinLnBrk="0" hangingPunct="1">
+    <a:lvl2pPr marL="457200" algn="l" defTabSz="914400" rtl="0" eaLnBrk="1" latinLnBrk="1" hangingPunct="1">
       <a:defRPr sz="1200" kern="1200">
         <a:solidFill>
           <a:schemeClr val="tx1"/>
@@ -427,7 +445,7 @@
         <a:cs typeface="+mn-cs"/>
       </a:defRPr>
     </a:lvl2pPr>
-    <a:lvl3pPr marL="914400" algn="l" defTabSz="457200" rtl="0" eaLnBrk="1" latinLnBrk="0" hangingPunct="1">
+    <a:lvl3pPr marL="914400" algn="l" defTabSz="914400" rtl="0" eaLnBrk="1" latinLnBrk="1" hangingPunct="1">
       <a:defRPr sz="1200" kern="1200">
         <a:solidFill>
           <a:schemeClr val="tx1"/>
@@ -437,7 +455,7 @@
         <a:cs typeface="+mn-cs"/>
       </a:defRPr>
     </a:lvl3pPr>
-    <a:lvl4pPr marL="1371600" algn="l" defTabSz="457200" rtl="0" eaLnBrk="1" latinLnBrk="0" hangingPunct="1">
+    <a:lvl4pPr marL="1371600" algn="l" defTabSz="914400" rtl="0" eaLnBrk="1" latinLnBrk="1" hangingPunct="1">
       <a:defRPr sz="1200" kern="1200">
         <a:solidFill>
           <a:schemeClr val="tx1"/>
@@ -447,7 +465,7 @@
         <a:cs typeface="+mn-cs"/>
       </a:defRPr>
     </a:lvl4pPr>
-    <a:lvl5pPr marL="1828800" algn="l" defTabSz="457200" rtl="0" eaLnBrk="1" latinLnBrk="0" hangingPunct="1">
+    <a:lvl5pPr marL="1828800" algn="l" defTabSz="914400" rtl="0" eaLnBrk="1" latinLnBrk="1" hangingPunct="1">
       <a:defRPr sz="1200" kern="1200">
         <a:solidFill>
           <a:schemeClr val="tx1"/>
@@ -457,7 +475,7 @@
         <a:cs typeface="+mn-cs"/>
       </a:defRPr>
     </a:lvl5pPr>
-    <a:lvl6pPr marL="2286000" algn="l" defTabSz="457200" rtl="0" eaLnBrk="1" latinLnBrk="0" hangingPunct="1">
+    <a:lvl6pPr marL="2286000" algn="l" defTabSz="914400" rtl="0" eaLnBrk="1" latinLnBrk="1" hangingPunct="1">
       <a:defRPr sz="1200" kern="1200">
         <a:solidFill>
           <a:schemeClr val="tx1"/>
@@ -467,7 +485,7 @@
         <a:cs typeface="+mn-cs"/>
       </a:defRPr>
     </a:lvl6pPr>
-    <a:lvl7pPr marL="2743200" algn="l" defTabSz="457200" rtl="0" eaLnBrk="1" latinLnBrk="0" hangingPunct="1">
+    <a:lvl7pPr marL="2743200" algn="l" defTabSz="914400" rtl="0" eaLnBrk="1" latinLnBrk="1" hangingPunct="1">
       <a:defRPr sz="1200" kern="1200">
         <a:solidFill>
           <a:schemeClr val="tx1"/>
@@ -477,7 +495,7 @@
         <a:cs typeface="+mn-cs"/>
       </a:defRPr>
     </a:lvl7pPr>
-    <a:lvl8pPr marL="3200400" algn="l" defTabSz="457200" rtl="0" eaLnBrk="1" latinLnBrk="0" hangingPunct="1">
+    <a:lvl8pPr marL="3200400" algn="l" defTabSz="914400" rtl="0" eaLnBrk="1" latinLnBrk="1" hangingPunct="1">
       <a:defRPr sz="1200" kern="1200">
         <a:solidFill>
           <a:schemeClr val="tx1"/>
@@ -487,7 +505,7 @@
         <a:cs typeface="+mn-cs"/>
       </a:defRPr>
     </a:lvl8pPr>
-    <a:lvl9pPr marL="3657600" algn="l" defTabSz="457200" rtl="0" eaLnBrk="1" latinLnBrk="0" hangingPunct="1">
+    <a:lvl9pPr marL="3657600" algn="l" defTabSz="914400" rtl="0" eaLnBrk="1" latinLnBrk="1" hangingPunct="1">
       <a:defRPr sz="1200" kern="1200">
         <a:solidFill>
           <a:schemeClr val="tx1"/>
@@ -502,7 +520,7 @@
 </file>
 
 <file path=ppt/notesSlides/notesSlide1.xml><?xml version="1.0" encoding="utf-8"?>
-<p:notes xmlns:a="http://schemas.openxmlformats.org/drawingml/2006/main" xmlns:p="http://schemas.openxmlformats.org/presentationml/2006/main" xmlns:r="http://schemas.openxmlformats.org/officeDocument/2006/relationships">
+<p:notes xmlns:a="http://schemas.openxmlformats.org/drawingml/2006/main" xmlns:r="http://schemas.openxmlformats.org/officeDocument/2006/relationships" xmlns:p="http://schemas.openxmlformats.org/presentationml/2006/main">
   <p:cSld>
     <p:spTree>
       <p:nvGrpSpPr>
@@ -522,7 +540,7 @@
         <p:nvSpPr>
           <p:cNvPr id="2" name="Slide Image Placeholder 1"/>
           <p:cNvSpPr>
-            <a:spLocks noGrp="1"/>
+            <a:spLocks noGrp="1" noRot="1" noChangeAspect="1"/>
           </p:cNvSpPr>
           <p:nvPr>
             <p:ph type="sldImg" idx="2"/>
@@ -537,7 +555,7 @@
             <a:spLocks noGrp="1"/>
           </p:cNvSpPr>
           <p:nvPr>
-            <p:ph type="body" idx="3" sz="quarter"/>
+            <p:ph type="body" sz="quarter" idx="3"/>
           </p:nvPr>
         </p:nvSpPr>
         <p:spPr/>
@@ -558,7 +576,7 @@
             <a:spLocks noGrp="1"/>
           </p:cNvSpPr>
           <p:nvPr>
-            <p:ph type="sldNum" idx="5" sz="quarter"/>
+            <p:ph type="sldNum" sz="quarter" idx="5"/>
           </p:nvPr>
         </p:nvSpPr>
         <p:spPr/>
@@ -572,7 +590,7 @@
 </file>
 
 <file path=ppt/notesSlides/notesSlide10.xml><?xml version="1.0" encoding="utf-8"?>
-<p:notes xmlns:a="http://schemas.openxmlformats.org/drawingml/2006/main" xmlns:p="http://schemas.openxmlformats.org/presentationml/2006/main" xmlns:r="http://schemas.openxmlformats.org/officeDocument/2006/relationships">
+<p:notes xmlns:a="http://schemas.openxmlformats.org/drawingml/2006/main" xmlns:r="http://schemas.openxmlformats.org/officeDocument/2006/relationships" xmlns:p="http://schemas.openxmlformats.org/presentationml/2006/main">
   <p:cSld>
     <p:spTree>
       <p:nvGrpSpPr>
@@ -592,7 +610,7 @@
         <p:nvSpPr>
           <p:cNvPr id="2" name="Slide Image Placeholder 1"/>
           <p:cNvSpPr>
-            <a:spLocks noGrp="1"/>
+            <a:spLocks noGrp="1" noRot="1" noChangeAspect="1"/>
           </p:cNvSpPr>
           <p:nvPr>
             <p:ph type="sldImg" idx="2"/>
@@ -607,7 +625,7 @@
             <a:spLocks noGrp="1"/>
           </p:cNvSpPr>
           <p:nvPr>
-            <p:ph type="body" idx="3" sz="quarter"/>
+            <p:ph type="body" sz="quarter" idx="3"/>
           </p:nvPr>
         </p:nvSpPr>
         <p:spPr/>
@@ -628,7 +646,7 @@
             <a:spLocks noGrp="1"/>
           </p:cNvSpPr>
           <p:nvPr>
-            <p:ph type="sldNum" idx="5" sz="quarter"/>
+            <p:ph type="sldNum" sz="quarter" idx="5"/>
           </p:nvPr>
         </p:nvSpPr>
         <p:spPr/>
@@ -642,7 +660,7 @@
 </file>
 
 <file path=ppt/notesSlides/notesSlide11.xml><?xml version="1.0" encoding="utf-8"?>
-<p:notes xmlns:a="http://schemas.openxmlformats.org/drawingml/2006/main" xmlns:p="http://schemas.openxmlformats.org/presentationml/2006/main" xmlns:r="http://schemas.openxmlformats.org/officeDocument/2006/relationships">
+<p:notes xmlns:a="http://schemas.openxmlformats.org/drawingml/2006/main" xmlns:r="http://schemas.openxmlformats.org/officeDocument/2006/relationships" xmlns:p="http://schemas.openxmlformats.org/presentationml/2006/main">
   <p:cSld>
     <p:spTree>
       <p:nvGrpSpPr>
@@ -662,7 +680,7 @@
         <p:nvSpPr>
           <p:cNvPr id="2" name="Slide Image Placeholder 1"/>
           <p:cNvSpPr>
-            <a:spLocks noGrp="1"/>
+            <a:spLocks noGrp="1" noRot="1" noChangeAspect="1"/>
           </p:cNvSpPr>
           <p:nvPr>
             <p:ph type="sldImg" idx="2"/>
@@ -677,7 +695,7 @@
             <a:spLocks noGrp="1"/>
           </p:cNvSpPr>
           <p:nvPr>
-            <p:ph type="body" idx="3" sz="quarter"/>
+            <p:ph type="body" sz="quarter" idx="3"/>
           </p:nvPr>
         </p:nvSpPr>
         <p:spPr/>
@@ -698,7 +716,7 @@
             <a:spLocks noGrp="1"/>
           </p:cNvSpPr>
           <p:nvPr>
-            <p:ph type="sldNum" idx="5" sz="quarter"/>
+            <p:ph type="sldNum" sz="quarter" idx="5"/>
           </p:nvPr>
         </p:nvSpPr>
         <p:spPr/>
@@ -712,7 +730,7 @@
 </file>
 
 <file path=ppt/notesSlides/notesSlide12.xml><?xml version="1.0" encoding="utf-8"?>
-<p:notes xmlns:a="http://schemas.openxmlformats.org/drawingml/2006/main" xmlns:p="http://schemas.openxmlformats.org/presentationml/2006/main" xmlns:r="http://schemas.openxmlformats.org/officeDocument/2006/relationships">
+<p:notes xmlns:a="http://schemas.openxmlformats.org/drawingml/2006/main" xmlns:r="http://schemas.openxmlformats.org/officeDocument/2006/relationships" xmlns:p="http://schemas.openxmlformats.org/presentationml/2006/main">
   <p:cSld>
     <p:spTree>
       <p:nvGrpSpPr>
@@ -732,7 +750,7 @@
         <p:nvSpPr>
           <p:cNvPr id="2" name="Slide Image Placeholder 1"/>
           <p:cNvSpPr>
-            <a:spLocks noGrp="1"/>
+            <a:spLocks noGrp="1" noRot="1" noChangeAspect="1"/>
           </p:cNvSpPr>
           <p:nvPr>
             <p:ph type="sldImg" idx="2"/>
@@ -747,7 +765,7 @@
             <a:spLocks noGrp="1"/>
           </p:cNvSpPr>
           <p:nvPr>
-            <p:ph type="body" idx="3" sz="quarter"/>
+            <p:ph type="body" sz="quarter" idx="3"/>
           </p:nvPr>
         </p:nvSpPr>
         <p:spPr/>
@@ -768,7 +786,7 @@
             <a:spLocks noGrp="1"/>
           </p:cNvSpPr>
           <p:nvPr>
-            <p:ph type="sldNum" idx="5" sz="quarter"/>
+            <p:ph type="sldNum" sz="quarter" idx="5"/>
           </p:nvPr>
         </p:nvSpPr>
         <p:spPr/>
@@ -782,7 +800,7 @@
 </file>
 
 <file path=ppt/notesSlides/notesSlide13.xml><?xml version="1.0" encoding="utf-8"?>
-<p:notes xmlns:a="http://schemas.openxmlformats.org/drawingml/2006/main" xmlns:p="http://schemas.openxmlformats.org/presentationml/2006/main" xmlns:r="http://schemas.openxmlformats.org/officeDocument/2006/relationships">
+<p:notes xmlns:a="http://schemas.openxmlformats.org/drawingml/2006/main" xmlns:r="http://schemas.openxmlformats.org/officeDocument/2006/relationships" xmlns:p="http://schemas.openxmlformats.org/presentationml/2006/main">
   <p:cSld>
     <p:spTree>
       <p:nvGrpSpPr>
@@ -802,7 +820,7 @@
         <p:nvSpPr>
           <p:cNvPr id="2" name="Slide Image Placeholder 1"/>
           <p:cNvSpPr>
-            <a:spLocks noGrp="1"/>
+            <a:spLocks noGrp="1" noRot="1" noChangeAspect="1"/>
           </p:cNvSpPr>
           <p:nvPr>
             <p:ph type="sldImg" idx="2"/>
@@ -817,7 +835,7 @@
             <a:spLocks noGrp="1"/>
           </p:cNvSpPr>
           <p:nvPr>
-            <p:ph type="body" idx="3" sz="quarter"/>
+            <p:ph type="body" sz="quarter" idx="3"/>
           </p:nvPr>
         </p:nvSpPr>
         <p:spPr/>
@@ -838,7 +856,7 @@
             <a:spLocks noGrp="1"/>
           </p:cNvSpPr>
           <p:nvPr>
-            <p:ph type="sldNum" idx="5" sz="quarter"/>
+            <p:ph type="sldNum" sz="quarter" idx="5"/>
           </p:nvPr>
         </p:nvSpPr>
         <p:spPr/>
@@ -852,7 +870,7 @@
 </file>
 
 <file path=ppt/notesSlides/notesSlide14.xml><?xml version="1.0" encoding="utf-8"?>
-<p:notes xmlns:a="http://schemas.openxmlformats.org/drawingml/2006/main" xmlns:p="http://schemas.openxmlformats.org/presentationml/2006/main" xmlns:r="http://schemas.openxmlformats.org/officeDocument/2006/relationships">
+<p:notes xmlns:a="http://schemas.openxmlformats.org/drawingml/2006/main" xmlns:r="http://schemas.openxmlformats.org/officeDocument/2006/relationships" xmlns:p="http://schemas.openxmlformats.org/presentationml/2006/main">
   <p:cSld>
     <p:spTree>
       <p:nvGrpSpPr>
@@ -872,7 +890,7 @@
         <p:nvSpPr>
           <p:cNvPr id="2" name="Slide Image Placeholder 1"/>
           <p:cNvSpPr>
-            <a:spLocks noGrp="1"/>
+            <a:spLocks noGrp="1" noRot="1" noChangeAspect="1"/>
           </p:cNvSpPr>
           <p:nvPr>
             <p:ph type="sldImg" idx="2"/>
@@ -887,7 +905,7 @@
             <a:spLocks noGrp="1"/>
           </p:cNvSpPr>
           <p:nvPr>
-            <p:ph type="body" idx="3" sz="quarter"/>
+            <p:ph type="body" sz="quarter" idx="3"/>
           </p:nvPr>
         </p:nvSpPr>
         <p:spPr/>
@@ -908,7 +926,7 @@
             <a:spLocks noGrp="1"/>
           </p:cNvSpPr>
           <p:nvPr>
-            <p:ph type="sldNum" idx="5" sz="quarter"/>
+            <p:ph type="sldNum" sz="quarter" idx="5"/>
           </p:nvPr>
         </p:nvSpPr>
         <p:spPr/>
@@ -922,7 +940,7 @@
 </file>
 
 <file path=ppt/notesSlides/notesSlide15.xml><?xml version="1.0" encoding="utf-8"?>
-<p:notes xmlns:a="http://schemas.openxmlformats.org/drawingml/2006/main" xmlns:p="http://schemas.openxmlformats.org/presentationml/2006/main" xmlns:r="http://schemas.openxmlformats.org/officeDocument/2006/relationships">
+<p:notes xmlns:a="http://schemas.openxmlformats.org/drawingml/2006/main" xmlns:r="http://schemas.openxmlformats.org/officeDocument/2006/relationships" xmlns:p="http://schemas.openxmlformats.org/presentationml/2006/main">
   <p:cSld>
     <p:spTree>
       <p:nvGrpSpPr>
@@ -942,7 +960,7 @@
         <p:nvSpPr>
           <p:cNvPr id="2" name="Slide Image Placeholder 1"/>
           <p:cNvSpPr>
-            <a:spLocks noGrp="1"/>
+            <a:spLocks noGrp="1" noRot="1" noChangeAspect="1"/>
           </p:cNvSpPr>
           <p:nvPr>
             <p:ph type="sldImg" idx="2"/>
@@ -957,7 +975,7 @@
             <a:spLocks noGrp="1"/>
           </p:cNvSpPr>
           <p:nvPr>
-            <p:ph type="body" idx="3" sz="quarter"/>
+            <p:ph type="body" sz="quarter" idx="3"/>
           </p:nvPr>
         </p:nvSpPr>
         <p:spPr/>
@@ -978,7 +996,7 @@
             <a:spLocks noGrp="1"/>
           </p:cNvSpPr>
           <p:nvPr>
-            <p:ph type="sldNum" idx="5" sz="quarter"/>
+            <p:ph type="sldNum" sz="quarter" idx="5"/>
           </p:nvPr>
         </p:nvSpPr>
         <p:spPr/>
@@ -992,7 +1010,7 @@
 </file>
 
 <file path=ppt/notesSlides/notesSlide16.xml><?xml version="1.0" encoding="utf-8"?>
-<p:notes xmlns:a="http://schemas.openxmlformats.org/drawingml/2006/main" xmlns:p="http://schemas.openxmlformats.org/presentationml/2006/main" xmlns:r="http://schemas.openxmlformats.org/officeDocument/2006/relationships">
+<p:notes xmlns:a="http://schemas.openxmlformats.org/drawingml/2006/main" xmlns:r="http://schemas.openxmlformats.org/officeDocument/2006/relationships" xmlns:p="http://schemas.openxmlformats.org/presentationml/2006/main">
   <p:cSld>
     <p:spTree>
       <p:nvGrpSpPr>
@@ -1012,7 +1030,7 @@
         <p:nvSpPr>
           <p:cNvPr id="2" name="Slide Image Placeholder 1"/>
           <p:cNvSpPr>
-            <a:spLocks noGrp="1"/>
+            <a:spLocks noGrp="1" noRot="1" noChangeAspect="1"/>
           </p:cNvSpPr>
           <p:nvPr>
             <p:ph type="sldImg" idx="2"/>
@@ -1027,7 +1045,7 @@
             <a:spLocks noGrp="1"/>
           </p:cNvSpPr>
           <p:nvPr>
-            <p:ph type="body" idx="3" sz="quarter"/>
+            <p:ph type="body" sz="quarter" idx="3"/>
           </p:nvPr>
         </p:nvSpPr>
         <p:spPr/>
@@ -1048,7 +1066,7 @@
             <a:spLocks noGrp="1"/>
           </p:cNvSpPr>
           <p:nvPr>
-            <p:ph type="sldNum" idx="5" sz="quarter"/>
+            <p:ph type="sldNum" sz="quarter" idx="5"/>
           </p:nvPr>
         </p:nvSpPr>
         <p:spPr/>
@@ -1062,7 +1080,7 @@
 </file>
 
 <file path=ppt/notesSlides/notesSlide17.xml><?xml version="1.0" encoding="utf-8"?>
-<p:notes xmlns:a="http://schemas.openxmlformats.org/drawingml/2006/main" xmlns:p="http://schemas.openxmlformats.org/presentationml/2006/main" xmlns:r="http://schemas.openxmlformats.org/officeDocument/2006/relationships">
+<p:notes xmlns:a="http://schemas.openxmlformats.org/drawingml/2006/main" xmlns:r="http://schemas.openxmlformats.org/officeDocument/2006/relationships" xmlns:p="http://schemas.openxmlformats.org/presentationml/2006/main">
   <p:cSld>
     <p:spTree>
       <p:nvGrpSpPr>
@@ -1082,7 +1100,7 @@
         <p:nvSpPr>
           <p:cNvPr id="2" name="Slide Image Placeholder 1"/>
           <p:cNvSpPr>
-            <a:spLocks noGrp="1"/>
+            <a:spLocks noGrp="1" noRot="1" noChangeAspect="1"/>
           </p:cNvSpPr>
           <p:nvPr>
             <p:ph type="sldImg" idx="2"/>
@@ -1097,7 +1115,7 @@
             <a:spLocks noGrp="1"/>
           </p:cNvSpPr>
           <p:nvPr>
-            <p:ph type="body" idx="3" sz="quarter"/>
+            <p:ph type="body" sz="quarter" idx="3"/>
           </p:nvPr>
         </p:nvSpPr>
         <p:spPr/>
@@ -1118,7 +1136,7 @@
             <a:spLocks noGrp="1"/>
           </p:cNvSpPr>
           <p:nvPr>
-            <p:ph type="sldNum" idx="5" sz="quarter"/>
+            <p:ph type="sldNum" sz="quarter" idx="5"/>
           </p:nvPr>
         </p:nvSpPr>
         <p:spPr/>
@@ -1132,7 +1150,7 @@
 </file>
 
 <file path=ppt/notesSlides/notesSlide18.xml><?xml version="1.0" encoding="utf-8"?>
-<p:notes xmlns:a="http://schemas.openxmlformats.org/drawingml/2006/main" xmlns:p="http://schemas.openxmlformats.org/presentationml/2006/main" xmlns:r="http://schemas.openxmlformats.org/officeDocument/2006/relationships">
+<p:notes xmlns:a="http://schemas.openxmlformats.org/drawingml/2006/main" xmlns:r="http://schemas.openxmlformats.org/officeDocument/2006/relationships" xmlns:p="http://schemas.openxmlformats.org/presentationml/2006/main">
   <p:cSld>
     <p:spTree>
       <p:nvGrpSpPr>
@@ -1152,7 +1170,7 @@
         <p:nvSpPr>
           <p:cNvPr id="2" name="Slide Image Placeholder 1"/>
           <p:cNvSpPr>
-            <a:spLocks noGrp="1"/>
+            <a:spLocks noGrp="1" noRot="1" noChangeAspect="1"/>
           </p:cNvSpPr>
           <p:nvPr>
             <p:ph type="sldImg" idx="2"/>
@@ -1167,7 +1185,7 @@
             <a:spLocks noGrp="1"/>
           </p:cNvSpPr>
           <p:nvPr>
-            <p:ph type="body" idx="3" sz="quarter"/>
+            <p:ph type="body" sz="quarter" idx="3"/>
           </p:nvPr>
         </p:nvSpPr>
         <p:spPr/>
@@ -1188,7 +1206,7 @@
             <a:spLocks noGrp="1"/>
           </p:cNvSpPr>
           <p:nvPr>
-            <p:ph type="sldNum" idx="5" sz="quarter"/>
+            <p:ph type="sldNum" sz="quarter" idx="5"/>
           </p:nvPr>
         </p:nvSpPr>
         <p:spPr/>
@@ -1202,7 +1220,7 @@
 </file>
 
 <file path=ppt/notesSlides/notesSlide19.xml><?xml version="1.0" encoding="utf-8"?>
-<p:notes xmlns:a="http://schemas.openxmlformats.org/drawingml/2006/main" xmlns:p="http://schemas.openxmlformats.org/presentationml/2006/main" xmlns:r="http://schemas.openxmlformats.org/officeDocument/2006/relationships">
+<p:notes xmlns:a="http://schemas.openxmlformats.org/drawingml/2006/main" xmlns:r="http://schemas.openxmlformats.org/officeDocument/2006/relationships" xmlns:p="http://schemas.openxmlformats.org/presentationml/2006/main">
   <p:cSld>
     <p:spTree>
       <p:nvGrpSpPr>
@@ -1222,7 +1240,7 @@
         <p:nvSpPr>
           <p:cNvPr id="2" name="Slide Image Placeholder 1"/>
           <p:cNvSpPr>
-            <a:spLocks noGrp="1"/>
+            <a:spLocks noGrp="1" noRot="1" noChangeAspect="1"/>
           </p:cNvSpPr>
           <p:nvPr>
             <p:ph type="sldImg" idx="2"/>
@@ -1237,7 +1255,7 @@
             <a:spLocks noGrp="1"/>
           </p:cNvSpPr>
           <p:nvPr>
-            <p:ph type="body" idx="3" sz="quarter"/>
+            <p:ph type="body" sz="quarter" idx="3"/>
           </p:nvPr>
         </p:nvSpPr>
         <p:spPr/>
@@ -1258,7 +1276,7 @@
             <a:spLocks noGrp="1"/>
           </p:cNvSpPr>
           <p:nvPr>
-            <p:ph type="sldNum" idx="5" sz="quarter"/>
+            <p:ph type="sldNum" sz="quarter" idx="5"/>
           </p:nvPr>
         </p:nvSpPr>
         <p:spPr/>
@@ -1272,7 +1290,7 @@
 </file>
 
 <file path=ppt/notesSlides/notesSlide2.xml><?xml version="1.0" encoding="utf-8"?>
-<p:notes xmlns:a="http://schemas.openxmlformats.org/drawingml/2006/main" xmlns:p="http://schemas.openxmlformats.org/presentationml/2006/main" xmlns:r="http://schemas.openxmlformats.org/officeDocument/2006/relationships">
+<p:notes xmlns:a="http://schemas.openxmlformats.org/drawingml/2006/main" xmlns:r="http://schemas.openxmlformats.org/officeDocument/2006/relationships" xmlns:p="http://schemas.openxmlformats.org/presentationml/2006/main">
   <p:cSld>
     <p:spTree>
       <p:nvGrpSpPr>
@@ -1292,7 +1310,7 @@
         <p:nvSpPr>
           <p:cNvPr id="2" name="Slide Image Placeholder 1"/>
           <p:cNvSpPr>
-            <a:spLocks noGrp="1"/>
+            <a:spLocks noGrp="1" noRot="1" noChangeAspect="1"/>
           </p:cNvSpPr>
           <p:nvPr>
             <p:ph type="sldImg" idx="2"/>
@@ -1307,7 +1325,7 @@
             <a:spLocks noGrp="1"/>
           </p:cNvSpPr>
           <p:nvPr>
-            <p:ph type="body" idx="3" sz="quarter"/>
+            <p:ph type="body" sz="quarter" idx="3"/>
           </p:nvPr>
         </p:nvSpPr>
         <p:spPr/>
@@ -1328,7 +1346,7 @@
             <a:spLocks noGrp="1"/>
           </p:cNvSpPr>
           <p:nvPr>
-            <p:ph type="sldNum" idx="5" sz="quarter"/>
+            <p:ph type="sldNum" sz="quarter" idx="5"/>
           </p:nvPr>
         </p:nvSpPr>
         <p:spPr/>
@@ -1342,7 +1360,7 @@
 </file>
 
 <file path=ppt/notesSlides/notesSlide20.xml><?xml version="1.0" encoding="utf-8"?>
-<p:notes xmlns:a="http://schemas.openxmlformats.org/drawingml/2006/main" xmlns:p="http://schemas.openxmlformats.org/presentationml/2006/main" xmlns:r="http://schemas.openxmlformats.org/officeDocument/2006/relationships">
+<p:notes xmlns:a="http://schemas.openxmlformats.org/drawingml/2006/main" xmlns:r="http://schemas.openxmlformats.org/officeDocument/2006/relationships" xmlns:p="http://schemas.openxmlformats.org/presentationml/2006/main">
   <p:cSld>
     <p:spTree>
       <p:nvGrpSpPr>
@@ -1362,7 +1380,7 @@
         <p:nvSpPr>
           <p:cNvPr id="2" name="Slide Image Placeholder 1"/>
           <p:cNvSpPr>
-            <a:spLocks noGrp="1"/>
+            <a:spLocks noGrp="1" noRot="1" noChangeAspect="1"/>
           </p:cNvSpPr>
           <p:nvPr>
             <p:ph type="sldImg" idx="2"/>
@@ -1377,7 +1395,7 @@
             <a:spLocks noGrp="1"/>
           </p:cNvSpPr>
           <p:nvPr>
-            <p:ph type="body" idx="3" sz="quarter"/>
+            <p:ph type="body" sz="quarter" idx="3"/>
           </p:nvPr>
         </p:nvSpPr>
         <p:spPr/>
@@ -1398,7 +1416,7 @@
             <a:spLocks noGrp="1"/>
           </p:cNvSpPr>
           <p:nvPr>
-            <p:ph type="sldNum" idx="5" sz="quarter"/>
+            <p:ph type="sldNum" sz="quarter" idx="5"/>
           </p:nvPr>
         </p:nvSpPr>
         <p:spPr/>
@@ -1412,7 +1430,7 @@
 </file>
 
 <file path=ppt/notesSlides/notesSlide21.xml><?xml version="1.0" encoding="utf-8"?>
-<p:notes xmlns:a="http://schemas.openxmlformats.org/drawingml/2006/main" xmlns:p="http://schemas.openxmlformats.org/presentationml/2006/main" xmlns:r="http://schemas.openxmlformats.org/officeDocument/2006/relationships">
+<p:notes xmlns:a="http://schemas.openxmlformats.org/drawingml/2006/main" xmlns:r="http://schemas.openxmlformats.org/officeDocument/2006/relationships" xmlns:p="http://schemas.openxmlformats.org/presentationml/2006/main">
   <p:cSld>
     <p:spTree>
       <p:nvGrpSpPr>
@@ -1432,7 +1450,7 @@
         <p:nvSpPr>
           <p:cNvPr id="2" name="Slide Image Placeholder 1"/>
           <p:cNvSpPr>
-            <a:spLocks noGrp="1"/>
+            <a:spLocks noGrp="1" noRot="1" noChangeAspect="1"/>
           </p:cNvSpPr>
           <p:nvPr>
             <p:ph type="sldImg" idx="2"/>
@@ -1447,7 +1465,7 @@
             <a:spLocks noGrp="1"/>
           </p:cNvSpPr>
           <p:nvPr>
-            <p:ph type="body" idx="3" sz="quarter"/>
+            <p:ph type="body" sz="quarter" idx="3"/>
           </p:nvPr>
         </p:nvSpPr>
         <p:spPr/>
@@ -1468,7 +1486,7 @@
             <a:spLocks noGrp="1"/>
           </p:cNvSpPr>
           <p:nvPr>
-            <p:ph type="sldNum" idx="5" sz="quarter"/>
+            <p:ph type="sldNum" sz="quarter" idx="5"/>
           </p:nvPr>
         </p:nvSpPr>
         <p:spPr/>
@@ -1482,7 +1500,7 @@
 </file>
 
 <file path=ppt/notesSlides/notesSlide22.xml><?xml version="1.0" encoding="utf-8"?>
-<p:notes xmlns:a="http://schemas.openxmlformats.org/drawingml/2006/main" xmlns:p="http://schemas.openxmlformats.org/presentationml/2006/main" xmlns:r="http://schemas.openxmlformats.org/officeDocument/2006/relationships">
+<p:notes xmlns:a="http://schemas.openxmlformats.org/drawingml/2006/main" xmlns:r="http://schemas.openxmlformats.org/officeDocument/2006/relationships" xmlns:p="http://schemas.openxmlformats.org/presentationml/2006/main">
   <p:cSld>
     <p:spTree>
       <p:nvGrpSpPr>
@@ -1502,7 +1520,7 @@
         <p:nvSpPr>
           <p:cNvPr id="2" name="Slide Image Placeholder 1"/>
           <p:cNvSpPr>
-            <a:spLocks noGrp="1"/>
+            <a:spLocks noGrp="1" noRot="1" noChangeAspect="1"/>
           </p:cNvSpPr>
           <p:nvPr>
             <p:ph type="sldImg" idx="2"/>
@@ -1517,7 +1535,7 @@
             <a:spLocks noGrp="1"/>
           </p:cNvSpPr>
           <p:nvPr>
-            <p:ph type="body" idx="3" sz="quarter"/>
+            <p:ph type="body" sz="quarter" idx="3"/>
           </p:nvPr>
         </p:nvSpPr>
         <p:spPr/>
@@ -1538,7 +1556,7 @@
             <a:spLocks noGrp="1"/>
           </p:cNvSpPr>
           <p:nvPr>
-            <p:ph type="sldNum" idx="5" sz="quarter"/>
+            <p:ph type="sldNum" sz="quarter" idx="5"/>
           </p:nvPr>
         </p:nvSpPr>
         <p:spPr/>
@@ -1552,7 +1570,7 @@
 </file>
 
 <file path=ppt/notesSlides/notesSlide23.xml><?xml version="1.0" encoding="utf-8"?>
-<p:notes xmlns:a="http://schemas.openxmlformats.org/drawingml/2006/main" xmlns:p="http://schemas.openxmlformats.org/presentationml/2006/main" xmlns:r="http://schemas.openxmlformats.org/officeDocument/2006/relationships">
+<p:notes xmlns:a="http://schemas.openxmlformats.org/drawingml/2006/main" xmlns:r="http://schemas.openxmlformats.org/officeDocument/2006/relationships" xmlns:p="http://schemas.openxmlformats.org/presentationml/2006/main">
   <p:cSld>
     <p:spTree>
       <p:nvGrpSpPr>
@@ -1572,7 +1590,7 @@
         <p:nvSpPr>
           <p:cNvPr id="2" name="Slide Image Placeholder 1"/>
           <p:cNvSpPr>
-            <a:spLocks noGrp="1"/>
+            <a:spLocks noGrp="1" noRot="1" noChangeAspect="1"/>
           </p:cNvSpPr>
           <p:nvPr>
             <p:ph type="sldImg" idx="2"/>
@@ -1587,7 +1605,7 @@
             <a:spLocks noGrp="1"/>
           </p:cNvSpPr>
           <p:nvPr>
-            <p:ph type="body" idx="3" sz="quarter"/>
+            <p:ph type="body" sz="quarter" idx="3"/>
           </p:nvPr>
         </p:nvSpPr>
         <p:spPr/>
@@ -1608,7 +1626,7 @@
             <a:spLocks noGrp="1"/>
           </p:cNvSpPr>
           <p:nvPr>
-            <p:ph type="sldNum" idx="5" sz="quarter"/>
+            <p:ph type="sldNum" sz="quarter" idx="5"/>
           </p:nvPr>
         </p:nvSpPr>
         <p:spPr/>
@@ -1622,7 +1640,7 @@
 </file>
 
 <file path=ppt/notesSlides/notesSlide24.xml><?xml version="1.0" encoding="utf-8"?>
-<p:notes xmlns:a="http://schemas.openxmlformats.org/drawingml/2006/main" xmlns:p="http://schemas.openxmlformats.org/presentationml/2006/main" xmlns:r="http://schemas.openxmlformats.org/officeDocument/2006/relationships">
+<p:notes xmlns:a="http://schemas.openxmlformats.org/drawingml/2006/main" xmlns:r="http://schemas.openxmlformats.org/officeDocument/2006/relationships" xmlns:p="http://schemas.openxmlformats.org/presentationml/2006/main">
   <p:cSld>
     <p:spTree>
       <p:nvGrpSpPr>
@@ -1642,7 +1660,7 @@
         <p:nvSpPr>
           <p:cNvPr id="2" name="Slide Image Placeholder 1"/>
           <p:cNvSpPr>
-            <a:spLocks noGrp="1"/>
+            <a:spLocks noGrp="1" noRot="1" noChangeAspect="1"/>
           </p:cNvSpPr>
           <p:nvPr>
             <p:ph type="sldImg" idx="2"/>
@@ -1657,7 +1675,7 @@
             <a:spLocks noGrp="1"/>
           </p:cNvSpPr>
           <p:nvPr>
-            <p:ph type="body" idx="3" sz="quarter"/>
+            <p:ph type="body" sz="quarter" idx="3"/>
           </p:nvPr>
         </p:nvSpPr>
         <p:spPr/>
@@ -1678,7 +1696,7 @@
             <a:spLocks noGrp="1"/>
           </p:cNvSpPr>
           <p:nvPr>
-            <p:ph type="sldNum" idx="5" sz="quarter"/>
+            <p:ph type="sldNum" sz="quarter" idx="5"/>
           </p:nvPr>
         </p:nvSpPr>
         <p:spPr/>
@@ -1692,7 +1710,7 @@
 </file>
 
 <file path=ppt/notesSlides/notesSlide25.xml><?xml version="1.0" encoding="utf-8"?>
-<p:notes xmlns:a="http://schemas.openxmlformats.org/drawingml/2006/main" xmlns:p="http://schemas.openxmlformats.org/presentationml/2006/main" xmlns:r="http://schemas.openxmlformats.org/officeDocument/2006/relationships">
+<p:notes xmlns:a="http://schemas.openxmlformats.org/drawingml/2006/main" xmlns:r="http://schemas.openxmlformats.org/officeDocument/2006/relationships" xmlns:p="http://schemas.openxmlformats.org/presentationml/2006/main">
   <p:cSld>
     <p:spTree>
       <p:nvGrpSpPr>
@@ -1712,7 +1730,7 @@
         <p:nvSpPr>
           <p:cNvPr id="2" name="Slide Image Placeholder 1"/>
           <p:cNvSpPr>
-            <a:spLocks noGrp="1"/>
+            <a:spLocks noGrp="1" noRot="1" noChangeAspect="1"/>
           </p:cNvSpPr>
           <p:nvPr>
             <p:ph type="sldImg" idx="2"/>
@@ -1727,7 +1745,7 @@
             <a:spLocks noGrp="1"/>
           </p:cNvSpPr>
           <p:nvPr>
-            <p:ph type="body" idx="3" sz="quarter"/>
+            <p:ph type="body" sz="quarter" idx="3"/>
           </p:nvPr>
         </p:nvSpPr>
         <p:spPr/>
@@ -1748,7 +1766,7 @@
             <a:spLocks noGrp="1"/>
           </p:cNvSpPr>
           <p:nvPr>
-            <p:ph type="sldNum" idx="5" sz="quarter"/>
+            <p:ph type="sldNum" sz="quarter" idx="5"/>
           </p:nvPr>
         </p:nvSpPr>
         <p:spPr/>
@@ -1762,7 +1780,7 @@
 </file>
 
 <file path=ppt/notesSlides/notesSlide26.xml><?xml version="1.0" encoding="utf-8"?>
-<p:notes xmlns:a="http://schemas.openxmlformats.org/drawingml/2006/main" xmlns:p="http://schemas.openxmlformats.org/presentationml/2006/main" xmlns:r="http://schemas.openxmlformats.org/officeDocument/2006/relationships">
+<p:notes xmlns:a="http://schemas.openxmlformats.org/drawingml/2006/main" xmlns:r="http://schemas.openxmlformats.org/officeDocument/2006/relationships" xmlns:p="http://schemas.openxmlformats.org/presentationml/2006/main">
   <p:cSld>
     <p:spTree>
       <p:nvGrpSpPr>
@@ -1782,7 +1800,7 @@
         <p:nvSpPr>
           <p:cNvPr id="2" name="Slide Image Placeholder 1"/>
           <p:cNvSpPr>
-            <a:spLocks noGrp="1"/>
+            <a:spLocks noGrp="1" noRot="1" noChangeAspect="1"/>
           </p:cNvSpPr>
           <p:nvPr>
             <p:ph type="sldImg" idx="2"/>
@@ -1797,7 +1815,7 @@
             <a:spLocks noGrp="1"/>
           </p:cNvSpPr>
           <p:nvPr>
-            <p:ph type="body" idx="3" sz="quarter"/>
+            <p:ph type="body" sz="quarter" idx="3"/>
           </p:nvPr>
         </p:nvSpPr>
         <p:spPr/>
@@ -1818,7 +1836,7 @@
             <a:spLocks noGrp="1"/>
           </p:cNvSpPr>
           <p:nvPr>
-            <p:ph type="sldNum" idx="5" sz="quarter"/>
+            <p:ph type="sldNum" sz="quarter" idx="5"/>
           </p:nvPr>
         </p:nvSpPr>
         <p:spPr/>
@@ -1832,7 +1850,7 @@
 </file>
 
 <file path=ppt/notesSlides/notesSlide27.xml><?xml version="1.0" encoding="utf-8"?>
-<p:notes xmlns:a="http://schemas.openxmlformats.org/drawingml/2006/main" xmlns:p="http://schemas.openxmlformats.org/presentationml/2006/main" xmlns:r="http://schemas.openxmlformats.org/officeDocument/2006/relationships">
+<p:notes xmlns:a="http://schemas.openxmlformats.org/drawingml/2006/main" xmlns:r="http://schemas.openxmlformats.org/officeDocument/2006/relationships" xmlns:p="http://schemas.openxmlformats.org/presentationml/2006/main">
   <p:cSld>
     <p:spTree>
       <p:nvGrpSpPr>
@@ -1852,7 +1870,7 @@
         <p:nvSpPr>
           <p:cNvPr id="2" name="Slide Image Placeholder 1"/>
           <p:cNvSpPr>
-            <a:spLocks noGrp="1"/>
+            <a:spLocks noGrp="1" noRot="1" noChangeAspect="1"/>
           </p:cNvSpPr>
           <p:nvPr>
             <p:ph type="sldImg" idx="2"/>
@@ -1867,7 +1885,7 @@
             <a:spLocks noGrp="1"/>
           </p:cNvSpPr>
           <p:nvPr>
-            <p:ph type="body" idx="3" sz="quarter"/>
+            <p:ph type="body" sz="quarter" idx="3"/>
           </p:nvPr>
         </p:nvSpPr>
         <p:spPr/>
@@ -1888,7 +1906,7 @@
             <a:spLocks noGrp="1"/>
           </p:cNvSpPr>
           <p:nvPr>
-            <p:ph type="sldNum" idx="5" sz="quarter"/>
+            <p:ph type="sldNum" sz="quarter" idx="5"/>
           </p:nvPr>
         </p:nvSpPr>
         <p:spPr/>
@@ -1902,7 +1920,7 @@
 </file>
 
 <file path=ppt/notesSlides/notesSlide28.xml><?xml version="1.0" encoding="utf-8"?>
-<p:notes xmlns:a="http://schemas.openxmlformats.org/drawingml/2006/main" xmlns:p="http://schemas.openxmlformats.org/presentationml/2006/main" xmlns:r="http://schemas.openxmlformats.org/officeDocument/2006/relationships">
+<p:notes xmlns:a="http://schemas.openxmlformats.org/drawingml/2006/main" xmlns:r="http://schemas.openxmlformats.org/officeDocument/2006/relationships" xmlns:p="http://schemas.openxmlformats.org/presentationml/2006/main">
   <p:cSld>
     <p:spTree>
       <p:nvGrpSpPr>
@@ -1922,7 +1940,7 @@
         <p:nvSpPr>
           <p:cNvPr id="2" name="Slide Image Placeholder 1"/>
           <p:cNvSpPr>
-            <a:spLocks noGrp="1"/>
+            <a:spLocks noGrp="1" noRot="1" noChangeAspect="1"/>
           </p:cNvSpPr>
           <p:nvPr>
             <p:ph type="sldImg" idx="2"/>
@@ -1937,7 +1955,7 @@
             <a:spLocks noGrp="1"/>
           </p:cNvSpPr>
           <p:nvPr>
-            <p:ph type="body" idx="3" sz="quarter"/>
+            <p:ph type="body" sz="quarter" idx="3"/>
           </p:nvPr>
         </p:nvSpPr>
         <p:spPr/>
@@ -1958,7 +1976,7 @@
             <a:spLocks noGrp="1"/>
           </p:cNvSpPr>
           <p:nvPr>
-            <p:ph type="sldNum" idx="5" sz="quarter"/>
+            <p:ph type="sldNum" sz="quarter" idx="5"/>
           </p:nvPr>
         </p:nvSpPr>
         <p:spPr/>
@@ -1972,7 +1990,7 @@
 </file>
 
 <file path=ppt/notesSlides/notesSlide29.xml><?xml version="1.0" encoding="utf-8"?>
-<p:notes xmlns:a="http://schemas.openxmlformats.org/drawingml/2006/main" xmlns:p="http://schemas.openxmlformats.org/presentationml/2006/main" xmlns:r="http://schemas.openxmlformats.org/officeDocument/2006/relationships">
+<p:notes xmlns:a="http://schemas.openxmlformats.org/drawingml/2006/main" xmlns:r="http://schemas.openxmlformats.org/officeDocument/2006/relationships" xmlns:p="http://schemas.openxmlformats.org/presentationml/2006/main">
   <p:cSld>
     <p:spTree>
       <p:nvGrpSpPr>
@@ -1992,7 +2010,7 @@
         <p:nvSpPr>
           <p:cNvPr id="2" name="Slide Image Placeholder 1"/>
           <p:cNvSpPr>
-            <a:spLocks noGrp="1"/>
+            <a:spLocks noGrp="1" noRot="1" noChangeAspect="1"/>
           </p:cNvSpPr>
           <p:nvPr>
             <p:ph type="sldImg" idx="2"/>
@@ -2007,7 +2025,7 @@
             <a:spLocks noGrp="1"/>
           </p:cNvSpPr>
           <p:nvPr>
-            <p:ph type="body" idx="3" sz="quarter"/>
+            <p:ph type="body" sz="quarter" idx="3"/>
           </p:nvPr>
         </p:nvSpPr>
         <p:spPr/>
@@ -2028,7 +2046,7 @@
             <a:spLocks noGrp="1"/>
           </p:cNvSpPr>
           <p:nvPr>
-            <p:ph type="sldNum" idx="5" sz="quarter"/>
+            <p:ph type="sldNum" sz="quarter" idx="5"/>
           </p:nvPr>
         </p:nvSpPr>
         <p:spPr/>
@@ -2042,7 +2060,7 @@
 </file>
 
 <file path=ppt/notesSlides/notesSlide3.xml><?xml version="1.0" encoding="utf-8"?>
-<p:notes xmlns:a="http://schemas.openxmlformats.org/drawingml/2006/main" xmlns:p="http://schemas.openxmlformats.org/presentationml/2006/main" xmlns:r="http://schemas.openxmlformats.org/officeDocument/2006/relationships">
+<p:notes xmlns:a="http://schemas.openxmlformats.org/drawingml/2006/main" xmlns:r="http://schemas.openxmlformats.org/officeDocument/2006/relationships" xmlns:p="http://schemas.openxmlformats.org/presentationml/2006/main">
   <p:cSld>
     <p:spTree>
       <p:nvGrpSpPr>
@@ -2062,7 +2080,7 @@
         <p:nvSpPr>
           <p:cNvPr id="2" name="Slide Image Placeholder 1"/>
           <p:cNvSpPr>
-            <a:spLocks noGrp="1"/>
+            <a:spLocks noGrp="1" noRot="1" noChangeAspect="1"/>
           </p:cNvSpPr>
           <p:nvPr>
             <p:ph type="sldImg" idx="2"/>
@@ -2077,7 +2095,7 @@
             <a:spLocks noGrp="1"/>
           </p:cNvSpPr>
           <p:nvPr>
-            <p:ph type="body" idx="3" sz="quarter"/>
+            <p:ph type="body" sz="quarter" idx="3"/>
           </p:nvPr>
         </p:nvSpPr>
         <p:spPr/>
@@ -2098,7 +2116,7 @@
             <a:spLocks noGrp="1"/>
           </p:cNvSpPr>
           <p:nvPr>
-            <p:ph type="sldNum" idx="5" sz="quarter"/>
+            <p:ph type="sldNum" sz="quarter" idx="5"/>
           </p:nvPr>
         </p:nvSpPr>
         <p:spPr/>
@@ -2112,7 +2130,7 @@
 </file>
 
 <file path=ppt/notesSlides/notesSlide30.xml><?xml version="1.0" encoding="utf-8"?>
-<p:notes xmlns:a="http://schemas.openxmlformats.org/drawingml/2006/main" xmlns:p="http://schemas.openxmlformats.org/presentationml/2006/main" xmlns:r="http://schemas.openxmlformats.org/officeDocument/2006/relationships">
+<p:notes xmlns:a="http://schemas.openxmlformats.org/drawingml/2006/main" xmlns:r="http://schemas.openxmlformats.org/officeDocument/2006/relationships" xmlns:p="http://schemas.openxmlformats.org/presentationml/2006/main">
   <p:cSld>
     <p:spTree>
       <p:nvGrpSpPr>
@@ -2132,7 +2150,7 @@
         <p:nvSpPr>
           <p:cNvPr id="2" name="Slide Image Placeholder 1"/>
           <p:cNvSpPr>
-            <a:spLocks noGrp="1"/>
+            <a:spLocks noGrp="1" noRot="1" noChangeAspect="1"/>
           </p:cNvSpPr>
           <p:nvPr>
             <p:ph type="sldImg" idx="2"/>
@@ -2147,7 +2165,7 @@
             <a:spLocks noGrp="1"/>
           </p:cNvSpPr>
           <p:nvPr>
-            <p:ph type="body" idx="3" sz="quarter"/>
+            <p:ph type="body" sz="quarter" idx="3"/>
           </p:nvPr>
         </p:nvSpPr>
         <p:spPr/>
@@ -2168,7 +2186,7 @@
             <a:spLocks noGrp="1"/>
           </p:cNvSpPr>
           <p:nvPr>
-            <p:ph type="sldNum" idx="5" sz="quarter"/>
+            <p:ph type="sldNum" sz="quarter" idx="5"/>
           </p:nvPr>
         </p:nvSpPr>
         <p:spPr/>
@@ -2182,7 +2200,7 @@
 </file>
 
 <file path=ppt/notesSlides/notesSlide31.xml><?xml version="1.0" encoding="utf-8"?>
-<p:notes xmlns:a="http://schemas.openxmlformats.org/drawingml/2006/main" xmlns:p="http://schemas.openxmlformats.org/presentationml/2006/main" xmlns:r="http://schemas.openxmlformats.org/officeDocument/2006/relationships">
+<p:notes xmlns:a="http://schemas.openxmlformats.org/drawingml/2006/main" xmlns:r="http://schemas.openxmlformats.org/officeDocument/2006/relationships" xmlns:p="http://schemas.openxmlformats.org/presentationml/2006/main">
   <p:cSld>
     <p:spTree>
       <p:nvGrpSpPr>
@@ -2202,7 +2220,7 @@
         <p:nvSpPr>
           <p:cNvPr id="2" name="Slide Image Placeholder 1"/>
           <p:cNvSpPr>
-            <a:spLocks noGrp="1"/>
+            <a:spLocks noGrp="1" noRot="1" noChangeAspect="1"/>
           </p:cNvSpPr>
           <p:nvPr>
             <p:ph type="sldImg" idx="2"/>
@@ -2217,7 +2235,7 @@
             <a:spLocks noGrp="1"/>
           </p:cNvSpPr>
           <p:nvPr>
-            <p:ph type="body" idx="3" sz="quarter"/>
+            <p:ph type="body" sz="quarter" idx="3"/>
           </p:nvPr>
         </p:nvSpPr>
         <p:spPr/>
@@ -2238,7 +2256,7 @@
             <a:spLocks noGrp="1"/>
           </p:cNvSpPr>
           <p:nvPr>
-            <p:ph type="sldNum" idx="5" sz="quarter"/>
+            <p:ph type="sldNum" sz="quarter" idx="5"/>
           </p:nvPr>
         </p:nvSpPr>
         <p:spPr/>
@@ -2252,7 +2270,7 @@
 </file>
 
 <file path=ppt/notesSlides/notesSlide32.xml><?xml version="1.0" encoding="utf-8"?>
-<p:notes xmlns:a="http://schemas.openxmlformats.org/drawingml/2006/main" xmlns:p="http://schemas.openxmlformats.org/presentationml/2006/main" xmlns:r="http://schemas.openxmlformats.org/officeDocument/2006/relationships">
+<p:notes xmlns:a="http://schemas.openxmlformats.org/drawingml/2006/main" xmlns:r="http://schemas.openxmlformats.org/officeDocument/2006/relationships" xmlns:p="http://schemas.openxmlformats.org/presentationml/2006/main">
   <p:cSld>
     <p:spTree>
       <p:nvGrpSpPr>
@@ -2272,7 +2290,7 @@
         <p:nvSpPr>
           <p:cNvPr id="2" name="Slide Image Placeholder 1"/>
           <p:cNvSpPr>
-            <a:spLocks noGrp="1"/>
+            <a:spLocks noGrp="1" noRot="1" noChangeAspect="1"/>
           </p:cNvSpPr>
           <p:nvPr>
             <p:ph type="sldImg" idx="2"/>
@@ -2287,7 +2305,7 @@
             <a:spLocks noGrp="1"/>
           </p:cNvSpPr>
           <p:nvPr>
-            <p:ph type="body" idx="3" sz="quarter"/>
+            <p:ph type="body" sz="quarter" idx="3"/>
           </p:nvPr>
         </p:nvSpPr>
         <p:spPr/>
@@ -2308,7 +2326,7 @@
             <a:spLocks noGrp="1"/>
           </p:cNvSpPr>
           <p:nvPr>
-            <p:ph type="sldNum" idx="5" sz="quarter"/>
+            <p:ph type="sldNum" sz="quarter" idx="5"/>
           </p:nvPr>
         </p:nvSpPr>
         <p:spPr/>
@@ -2322,7 +2340,7 @@
 </file>
 
 <file path=ppt/notesSlides/notesSlide33.xml><?xml version="1.0" encoding="utf-8"?>
-<p:notes xmlns:a="http://schemas.openxmlformats.org/drawingml/2006/main" xmlns:p="http://schemas.openxmlformats.org/presentationml/2006/main" xmlns:r="http://schemas.openxmlformats.org/officeDocument/2006/relationships">
+<p:notes xmlns:a="http://schemas.openxmlformats.org/drawingml/2006/main" xmlns:r="http://schemas.openxmlformats.org/officeDocument/2006/relationships" xmlns:p="http://schemas.openxmlformats.org/presentationml/2006/main">
   <p:cSld>
     <p:spTree>
       <p:nvGrpSpPr>
@@ -2342,7 +2360,7 @@
         <p:nvSpPr>
           <p:cNvPr id="2" name="Slide Image Placeholder 1"/>
           <p:cNvSpPr>
-            <a:spLocks noGrp="1"/>
+            <a:spLocks noGrp="1" noRot="1" noChangeAspect="1"/>
           </p:cNvSpPr>
           <p:nvPr>
             <p:ph type="sldImg" idx="2"/>
@@ -2357,7 +2375,7 @@
             <a:spLocks noGrp="1"/>
           </p:cNvSpPr>
           <p:nvPr>
-            <p:ph type="body" idx="3" sz="quarter"/>
+            <p:ph type="body" sz="quarter" idx="3"/>
           </p:nvPr>
         </p:nvSpPr>
         <p:spPr/>
@@ -2378,7 +2396,7 @@
             <a:spLocks noGrp="1"/>
           </p:cNvSpPr>
           <p:nvPr>
-            <p:ph type="sldNum" idx="5" sz="quarter"/>
+            <p:ph type="sldNum" sz="quarter" idx="5"/>
           </p:nvPr>
         </p:nvSpPr>
         <p:spPr/>
@@ -2392,7 +2410,7 @@
 </file>
 
 <file path=ppt/notesSlides/notesSlide4.xml><?xml version="1.0" encoding="utf-8"?>
-<p:notes xmlns:a="http://schemas.openxmlformats.org/drawingml/2006/main" xmlns:p="http://schemas.openxmlformats.org/presentationml/2006/main" xmlns:r="http://schemas.openxmlformats.org/officeDocument/2006/relationships">
+<p:notes xmlns:a="http://schemas.openxmlformats.org/drawingml/2006/main" xmlns:r="http://schemas.openxmlformats.org/officeDocument/2006/relationships" xmlns:p="http://schemas.openxmlformats.org/presentationml/2006/main">
   <p:cSld>
     <p:spTree>
       <p:nvGrpSpPr>
@@ -2412,7 +2430,7 @@
         <p:nvSpPr>
           <p:cNvPr id="2" name="Slide Image Placeholder 1"/>
           <p:cNvSpPr>
-            <a:spLocks noGrp="1"/>
+            <a:spLocks noGrp="1" noRot="1" noChangeAspect="1"/>
           </p:cNvSpPr>
           <p:nvPr>
             <p:ph type="sldImg" idx="2"/>
@@ -2427,7 +2445,7 @@
             <a:spLocks noGrp="1"/>
           </p:cNvSpPr>
           <p:nvPr>
-            <p:ph type="body" idx="3" sz="quarter"/>
+            <p:ph type="body" sz="quarter" idx="3"/>
           </p:nvPr>
         </p:nvSpPr>
         <p:spPr/>
@@ -2448,7 +2466,7 @@
             <a:spLocks noGrp="1"/>
           </p:cNvSpPr>
           <p:nvPr>
-            <p:ph type="sldNum" idx="5" sz="quarter"/>
+            <p:ph type="sldNum" sz="quarter" idx="5"/>
           </p:nvPr>
         </p:nvSpPr>
         <p:spPr/>
@@ -2462,7 +2480,7 @@
 </file>
 
 <file path=ppt/notesSlides/notesSlide5.xml><?xml version="1.0" encoding="utf-8"?>
-<p:notes xmlns:a="http://schemas.openxmlformats.org/drawingml/2006/main" xmlns:p="http://schemas.openxmlformats.org/presentationml/2006/main" xmlns:r="http://schemas.openxmlformats.org/officeDocument/2006/relationships">
+<p:notes xmlns:a="http://schemas.openxmlformats.org/drawingml/2006/main" xmlns:r="http://schemas.openxmlformats.org/officeDocument/2006/relationships" xmlns:p="http://schemas.openxmlformats.org/presentationml/2006/main">
   <p:cSld>
     <p:spTree>
       <p:nvGrpSpPr>
@@ -2482,7 +2500,7 @@
         <p:nvSpPr>
           <p:cNvPr id="2" name="Slide Image Placeholder 1"/>
           <p:cNvSpPr>
-            <a:spLocks noGrp="1"/>
+            <a:spLocks noGrp="1" noRot="1" noChangeAspect="1"/>
           </p:cNvSpPr>
           <p:nvPr>
             <p:ph type="sldImg" idx="2"/>
@@ -2497,7 +2515,7 @@
             <a:spLocks noGrp="1"/>
           </p:cNvSpPr>
           <p:nvPr>
-            <p:ph type="body" idx="3" sz="quarter"/>
+            <p:ph type="body" sz="quarter" idx="3"/>
           </p:nvPr>
         </p:nvSpPr>
         <p:spPr/>
@@ -2518,7 +2536,7 @@
             <a:spLocks noGrp="1"/>
           </p:cNvSpPr>
           <p:nvPr>
-            <p:ph type="sldNum" idx="5" sz="quarter"/>
+            <p:ph type="sldNum" sz="quarter" idx="5"/>
           </p:nvPr>
         </p:nvSpPr>
         <p:spPr/>
@@ -2532,7 +2550,7 @@
 </file>
 
 <file path=ppt/notesSlides/notesSlide6.xml><?xml version="1.0" encoding="utf-8"?>
-<p:notes xmlns:a="http://schemas.openxmlformats.org/drawingml/2006/main" xmlns:p="http://schemas.openxmlformats.org/presentationml/2006/main" xmlns:r="http://schemas.openxmlformats.org/officeDocument/2006/relationships">
+<p:notes xmlns:a="http://schemas.openxmlformats.org/drawingml/2006/main" xmlns:r="http://schemas.openxmlformats.org/officeDocument/2006/relationships" xmlns:p="http://schemas.openxmlformats.org/presentationml/2006/main">
   <p:cSld>
     <p:spTree>
       <p:nvGrpSpPr>
@@ -2552,7 +2570,7 @@
         <p:nvSpPr>
           <p:cNvPr id="2" name="Slide Image Placeholder 1"/>
           <p:cNvSpPr>
-            <a:spLocks noGrp="1"/>
+            <a:spLocks noGrp="1" noRot="1" noChangeAspect="1"/>
           </p:cNvSpPr>
           <p:nvPr>
             <p:ph type="sldImg" idx="2"/>
@@ -2567,7 +2585,7 @@
             <a:spLocks noGrp="1"/>
           </p:cNvSpPr>
           <p:nvPr>
-            <p:ph type="body" idx="3" sz="quarter"/>
+            <p:ph type="body" sz="quarter" idx="3"/>
           </p:nvPr>
         </p:nvSpPr>
         <p:spPr/>
@@ -2588,7 +2606,7 @@
             <a:spLocks noGrp="1"/>
           </p:cNvSpPr>
           <p:nvPr>
-            <p:ph type="sldNum" idx="5" sz="quarter"/>
+            <p:ph type="sldNum" sz="quarter" idx="5"/>
           </p:nvPr>
         </p:nvSpPr>
         <p:spPr/>
@@ -2602,7 +2620,7 @@
 </file>
 
 <file path=ppt/notesSlides/notesSlide7.xml><?xml version="1.0" encoding="utf-8"?>
-<p:notes xmlns:a="http://schemas.openxmlformats.org/drawingml/2006/main" xmlns:p="http://schemas.openxmlformats.org/presentationml/2006/main" xmlns:r="http://schemas.openxmlformats.org/officeDocument/2006/relationships">
+<p:notes xmlns:a="http://schemas.openxmlformats.org/drawingml/2006/main" xmlns:r="http://schemas.openxmlformats.org/officeDocument/2006/relationships" xmlns:p="http://schemas.openxmlformats.org/presentationml/2006/main">
   <p:cSld>
     <p:spTree>
       <p:nvGrpSpPr>
@@ -2622,7 +2640,7 @@
         <p:nvSpPr>
           <p:cNvPr id="2" name="Slide Image Placeholder 1"/>
           <p:cNvSpPr>
-            <a:spLocks noGrp="1"/>
+            <a:spLocks noGrp="1" noRot="1" noChangeAspect="1"/>
           </p:cNvSpPr>
           <p:nvPr>
             <p:ph type="sldImg" idx="2"/>
@@ -2637,7 +2655,7 @@
             <a:spLocks noGrp="1"/>
           </p:cNvSpPr>
           <p:nvPr>
-            <p:ph type="body" idx="3" sz="quarter"/>
+            <p:ph type="body" sz="quarter" idx="3"/>
           </p:nvPr>
         </p:nvSpPr>
         <p:spPr/>
@@ -2658,7 +2676,7 @@
             <a:spLocks noGrp="1"/>
           </p:cNvSpPr>
           <p:nvPr>
-            <p:ph type="sldNum" idx="5" sz="quarter"/>
+            <p:ph type="sldNum" sz="quarter" idx="5"/>
           </p:nvPr>
         </p:nvSpPr>
         <p:spPr/>
@@ -2672,7 +2690,7 @@
 </file>
 
 <file path=ppt/notesSlides/notesSlide8.xml><?xml version="1.0" encoding="utf-8"?>
-<p:notes xmlns:a="http://schemas.openxmlformats.org/drawingml/2006/main" xmlns:p="http://schemas.openxmlformats.org/presentationml/2006/main" xmlns:r="http://schemas.openxmlformats.org/officeDocument/2006/relationships">
+<p:notes xmlns:a="http://schemas.openxmlformats.org/drawingml/2006/main" xmlns:r="http://schemas.openxmlformats.org/officeDocument/2006/relationships" xmlns:p="http://schemas.openxmlformats.org/presentationml/2006/main">
   <p:cSld>
     <p:spTree>
       <p:nvGrpSpPr>
@@ -2692,7 +2710,7 @@
         <p:nvSpPr>
           <p:cNvPr id="2" name="Slide Image Placeholder 1"/>
           <p:cNvSpPr>
-            <a:spLocks noGrp="1"/>
+            <a:spLocks noGrp="1" noRot="1" noChangeAspect="1"/>
           </p:cNvSpPr>
           <p:nvPr>
             <p:ph type="sldImg" idx="2"/>
@@ -2707,7 +2725,7 @@
             <a:spLocks noGrp="1"/>
           </p:cNvSpPr>
           <p:nvPr>
-            <p:ph type="body" idx="3" sz="quarter"/>
+            <p:ph type="body" sz="quarter" idx="3"/>
           </p:nvPr>
         </p:nvSpPr>
         <p:spPr/>
@@ -2728,7 +2746,7 @@
             <a:spLocks noGrp="1"/>
           </p:cNvSpPr>
           <p:nvPr>
-            <p:ph type="sldNum" idx="5" sz="quarter"/>
+            <p:ph type="sldNum" sz="quarter" idx="5"/>
           </p:nvPr>
         </p:nvSpPr>
         <p:spPr/>
@@ -2742,7 +2760,7 @@
 </file>
 
 <file path=ppt/notesSlides/notesSlide9.xml><?xml version="1.0" encoding="utf-8"?>
-<p:notes xmlns:a="http://schemas.openxmlformats.org/drawingml/2006/main" xmlns:p="http://schemas.openxmlformats.org/presentationml/2006/main" xmlns:r="http://schemas.openxmlformats.org/officeDocument/2006/relationships">
+<p:notes xmlns:a="http://schemas.openxmlformats.org/drawingml/2006/main" xmlns:r="http://schemas.openxmlformats.org/officeDocument/2006/relationships" xmlns:p="http://schemas.openxmlformats.org/presentationml/2006/main">
   <p:cSld>
     <p:spTree>
       <p:nvGrpSpPr>
@@ -2762,7 +2780,7 @@
         <p:nvSpPr>
           <p:cNvPr id="2" name="Slide Image Placeholder 1"/>
           <p:cNvSpPr>
-            <a:spLocks noGrp="1"/>
+            <a:spLocks noGrp="1" noRot="1" noChangeAspect="1"/>
           </p:cNvSpPr>
           <p:nvPr>
             <p:ph type="sldImg" idx="2"/>
@@ -2777,7 +2795,7 @@
             <a:spLocks noGrp="1"/>
           </p:cNvSpPr>
           <p:nvPr>
-            <p:ph type="body" idx="3" sz="quarter"/>
+            <p:ph type="body" sz="quarter" idx="3"/>
           </p:nvPr>
         </p:nvSpPr>
         <p:spPr/>
@@ -2798,7 +2816,7 @@
             <a:spLocks noGrp="1"/>
           </p:cNvSpPr>
           <p:nvPr>
-            <p:ph type="sldNum" idx="5" sz="quarter"/>
+            <p:ph type="sldNum" sz="quarter" idx="5"/>
           </p:nvPr>
         </p:nvSpPr>
         <p:spPr/>
@@ -2849,10 +2867,9 @@
           <a:lstStyle/>
           <a:p>
             <a:r>
-              <a:rPr lang="en-US" smtClean="0"/>
+              <a:rPr lang="en-US"/>
               <a:t>Click to edit Master title style</a:t>
             </a:r>
-            <a:endParaRPr lang="en-US"/>
           </a:p>
         </p:txBody>
       </p:sp>
@@ -2968,10 +2985,9 @@
           </a:lstStyle>
           <a:p>
             <a:r>
-              <a:rPr lang="en-US" smtClean="0"/>
+              <a:rPr lang="en-US"/>
               <a:t>Click to edit Master subtitle style</a:t>
             </a:r>
-            <a:endParaRPr lang="en-US"/>
           </a:p>
         </p:txBody>
       </p:sp>
@@ -2992,7 +3008,7 @@
           <a:p>
             <a:fld id="{5BCAD085-E8A6-8845-BD4E-CB4CCA059FC4}" type="datetimeFigureOut">
               <a:rPr lang="en-US" smtClean="0"/>
-              <a:t>1/27/13</a:t>
+              <a:t>10/29/2026</a:t>
             </a:fld>
             <a:endParaRPr lang="en-US"/>
           </a:p>
@@ -3086,10 +3102,9 @@
           <a:lstStyle/>
           <a:p>
             <a:r>
-              <a:rPr lang="en-US" smtClean="0"/>
+              <a:rPr lang="en-US"/>
               <a:t>Click to edit Master title style</a:t>
             </a:r>
-            <a:endParaRPr lang="en-US"/>
           </a:p>
         </p:txBody>
       </p:sp>
@@ -3110,38 +3125,37 @@
           <a:p>
             <a:pPr lvl="0"/>
             <a:r>
-              <a:rPr lang="en-US" smtClean="0"/>
+              <a:rPr lang="en-US"/>
               <a:t>Click to edit Master text styles</a:t>
             </a:r>
           </a:p>
           <a:p>
             <a:pPr lvl="1"/>
             <a:r>
-              <a:rPr lang="en-US" smtClean="0"/>
+              <a:rPr lang="en-US"/>
               <a:t>Second level</a:t>
             </a:r>
           </a:p>
           <a:p>
             <a:pPr lvl="2"/>
             <a:r>
-              <a:rPr lang="en-US" smtClean="0"/>
+              <a:rPr lang="en-US"/>
               <a:t>Third level</a:t>
             </a:r>
           </a:p>
           <a:p>
             <a:pPr lvl="3"/>
             <a:r>
-              <a:rPr lang="en-US" smtClean="0"/>
+              <a:rPr lang="en-US"/>
               <a:t>Fourth level</a:t>
             </a:r>
           </a:p>
           <a:p>
             <a:pPr lvl="4"/>
             <a:r>
-              <a:rPr lang="en-US" smtClean="0"/>
+              <a:rPr lang="en-US"/>
               <a:t>Fifth level</a:t>
             </a:r>
-            <a:endParaRPr lang="en-US"/>
           </a:p>
         </p:txBody>
       </p:sp>
@@ -3162,7 +3176,7 @@
           <a:p>
             <a:fld id="{5BCAD085-E8A6-8845-BD4E-CB4CCA059FC4}" type="datetimeFigureOut">
               <a:rPr lang="en-US" smtClean="0"/>
-              <a:t>1/27/13</a:t>
+              <a:t>10/29/2026</a:t>
             </a:fld>
             <a:endParaRPr lang="en-US"/>
           </a:p>
@@ -3261,10 +3275,9 @@
           <a:lstStyle/>
           <a:p>
             <a:r>
-              <a:rPr lang="en-US" smtClean="0"/>
+              <a:rPr lang="en-US"/>
               <a:t>Click to edit Master title style</a:t>
             </a:r>
-            <a:endParaRPr lang="en-US"/>
           </a:p>
         </p:txBody>
       </p:sp>
@@ -3290,38 +3303,37 @@
           <a:p>
             <a:pPr lvl="0"/>
             <a:r>
-              <a:rPr lang="en-US" smtClean="0"/>
+              <a:rPr lang="en-US"/>
               <a:t>Click to edit Master text styles</a:t>
             </a:r>
           </a:p>
           <a:p>
             <a:pPr lvl="1"/>
             <a:r>
-              <a:rPr lang="en-US" smtClean="0"/>
+              <a:rPr lang="en-US"/>
               <a:t>Second level</a:t>
             </a:r>
           </a:p>
           <a:p>
             <a:pPr lvl="2"/>
             <a:r>
-              <a:rPr lang="en-US" smtClean="0"/>
+              <a:rPr lang="en-US"/>
               <a:t>Third level</a:t>
             </a:r>
           </a:p>
           <a:p>
             <a:pPr lvl="3"/>
             <a:r>
-              <a:rPr lang="en-US" smtClean="0"/>
+              <a:rPr lang="en-US"/>
               <a:t>Fourth level</a:t>
             </a:r>
           </a:p>
           <a:p>
             <a:pPr lvl="4"/>
             <a:r>
-              <a:rPr lang="en-US" smtClean="0"/>
+              <a:rPr lang="en-US"/>
               <a:t>Fifth level</a:t>
             </a:r>
-            <a:endParaRPr lang="en-US"/>
           </a:p>
         </p:txBody>
       </p:sp>
@@ -3342,7 +3354,7 @@
           <a:p>
             <a:fld id="{5BCAD085-E8A6-8845-BD4E-CB4CCA059FC4}" type="datetimeFigureOut">
               <a:rPr lang="en-US" smtClean="0"/>
-              <a:t>1/27/13</a:t>
+              <a:t>10/29/2026</a:t>
             </a:fld>
             <a:endParaRPr lang="en-US"/>
           </a:p>
@@ -3436,10 +3448,9 @@
           <a:lstStyle/>
           <a:p>
             <a:r>
-              <a:rPr lang="en-US" smtClean="0"/>
+              <a:rPr lang="en-US"/>
               <a:t>Click to edit Master title style</a:t>
             </a:r>
-            <a:endParaRPr lang="en-US"/>
           </a:p>
         </p:txBody>
       </p:sp>
@@ -3460,38 +3471,37 @@
           <a:p>
             <a:pPr lvl="0"/>
             <a:r>
-              <a:rPr lang="en-US" smtClean="0"/>
+              <a:rPr lang="en-US"/>
               <a:t>Click to edit Master text styles</a:t>
             </a:r>
           </a:p>
           <a:p>
             <a:pPr lvl="1"/>
             <a:r>
-              <a:rPr lang="en-US" smtClean="0"/>
+              <a:rPr lang="en-US"/>
               <a:t>Second level</a:t>
             </a:r>
           </a:p>
           <a:p>
             <a:pPr lvl="2"/>
             <a:r>
-              <a:rPr lang="en-US" smtClean="0"/>
+              <a:rPr lang="en-US"/>
               <a:t>Third level</a:t>
             </a:r>
           </a:p>
           <a:p>
             <a:pPr lvl="3"/>
             <a:r>
-              <a:rPr lang="en-US" smtClean="0"/>
+              <a:rPr lang="en-US"/>
               <a:t>Fourth level</a:t>
             </a:r>
           </a:p>
           <a:p>
             <a:pPr lvl="4"/>
             <a:r>
-              <a:rPr lang="en-US" smtClean="0"/>
+              <a:rPr lang="en-US"/>
               <a:t>Fifth level</a:t>
             </a:r>
-            <a:endParaRPr lang="en-US"/>
           </a:p>
         </p:txBody>
       </p:sp>
@@ -3512,7 +3522,7 @@
           <a:p>
             <a:fld id="{5BCAD085-E8A6-8845-BD4E-CB4CCA059FC4}" type="datetimeFigureOut">
               <a:rPr lang="en-US" smtClean="0"/>
-              <a:t>1/27/13</a:t>
+              <a:t>10/29/2026</a:t>
             </a:fld>
             <a:endParaRPr lang="en-US"/>
           </a:p>
@@ -3615,10 +3625,9 @@
           </a:lstStyle>
           <a:p>
             <a:r>
-              <a:rPr lang="en-US" smtClean="0"/>
+              <a:rPr lang="en-US"/>
               <a:t>Click to edit Master title style</a:t>
             </a:r>
-            <a:endParaRPr lang="en-US"/>
           </a:p>
         </p:txBody>
       </p:sp>
@@ -3735,7 +3744,7 @@
           <a:p>
             <a:pPr lvl="0"/>
             <a:r>
-              <a:rPr lang="en-US" smtClean="0"/>
+              <a:rPr lang="en-US"/>
               <a:t>Click to edit Master text styles</a:t>
             </a:r>
           </a:p>
@@ -3758,7 +3767,7 @@
           <a:p>
             <a:fld id="{5BCAD085-E8A6-8845-BD4E-CB4CCA059FC4}" type="datetimeFigureOut">
               <a:rPr lang="en-US" smtClean="0"/>
-              <a:t>1/27/13</a:t>
+              <a:t>10/29/2026</a:t>
             </a:fld>
             <a:endParaRPr lang="en-US"/>
           </a:p>
@@ -3852,10 +3861,9 @@
           <a:lstStyle/>
           <a:p>
             <a:r>
-              <a:rPr lang="en-US" smtClean="0"/>
+              <a:rPr lang="en-US"/>
               <a:t>Click to edit Master title style</a:t>
             </a:r>
-            <a:endParaRPr lang="en-US"/>
           </a:p>
         </p:txBody>
       </p:sp>
@@ -3909,38 +3917,37 @@
           <a:p>
             <a:pPr lvl="0"/>
             <a:r>
-              <a:rPr lang="en-US" smtClean="0"/>
+              <a:rPr lang="en-US"/>
               <a:t>Click to edit Master text styles</a:t>
             </a:r>
           </a:p>
           <a:p>
             <a:pPr lvl="1"/>
             <a:r>
-              <a:rPr lang="en-US" smtClean="0"/>
+              <a:rPr lang="en-US"/>
               <a:t>Second level</a:t>
             </a:r>
           </a:p>
           <a:p>
             <a:pPr lvl="2"/>
             <a:r>
-              <a:rPr lang="en-US" smtClean="0"/>
+              <a:rPr lang="en-US"/>
               <a:t>Third level</a:t>
             </a:r>
           </a:p>
           <a:p>
             <a:pPr lvl="3"/>
             <a:r>
-              <a:rPr lang="en-US" smtClean="0"/>
+              <a:rPr lang="en-US"/>
               <a:t>Fourth level</a:t>
             </a:r>
           </a:p>
           <a:p>
             <a:pPr lvl="4"/>
             <a:r>
-              <a:rPr lang="en-US" smtClean="0"/>
+              <a:rPr lang="en-US"/>
               <a:t>Fifth level</a:t>
             </a:r>
-            <a:endParaRPr lang="en-US"/>
           </a:p>
         </p:txBody>
       </p:sp>
@@ -3994,38 +4001,37 @@
           <a:p>
             <a:pPr lvl="0"/>
             <a:r>
-              <a:rPr lang="en-US" smtClean="0"/>
+              <a:rPr lang="en-US"/>
               <a:t>Click to edit Master text styles</a:t>
             </a:r>
           </a:p>
           <a:p>
             <a:pPr lvl="1"/>
             <a:r>
-              <a:rPr lang="en-US" smtClean="0"/>
+              <a:rPr lang="en-US"/>
               <a:t>Second level</a:t>
             </a:r>
           </a:p>
           <a:p>
             <a:pPr lvl="2"/>
             <a:r>
-              <a:rPr lang="en-US" smtClean="0"/>
+              <a:rPr lang="en-US"/>
               <a:t>Third level</a:t>
             </a:r>
           </a:p>
           <a:p>
             <a:pPr lvl="3"/>
             <a:r>
-              <a:rPr lang="en-US" smtClean="0"/>
+              <a:rPr lang="en-US"/>
               <a:t>Fourth level</a:t>
             </a:r>
           </a:p>
           <a:p>
             <a:pPr lvl="4"/>
             <a:r>
-              <a:rPr lang="en-US" smtClean="0"/>
+              <a:rPr lang="en-US"/>
               <a:t>Fifth level</a:t>
             </a:r>
-            <a:endParaRPr lang="en-US"/>
           </a:p>
         </p:txBody>
       </p:sp>
@@ -4046,7 +4052,7 @@
           <a:p>
             <a:fld id="{5BCAD085-E8A6-8845-BD4E-CB4CCA059FC4}" type="datetimeFigureOut">
               <a:rPr lang="en-US" smtClean="0"/>
-              <a:t>1/27/13</a:t>
+              <a:t>10/29/2026</a:t>
             </a:fld>
             <a:endParaRPr lang="en-US"/>
           </a:p>
@@ -4144,10 +4150,9 @@
           </a:lstStyle>
           <a:p>
             <a:r>
-              <a:rPr lang="en-US" smtClean="0"/>
+              <a:rPr lang="en-US"/>
               <a:t>Click to edit Master title style</a:t>
             </a:r>
-            <a:endParaRPr lang="en-US"/>
           </a:p>
         </p:txBody>
       </p:sp>
@@ -4210,7 +4215,7 @@
           <a:p>
             <a:pPr lvl="0"/>
             <a:r>
-              <a:rPr lang="en-US" smtClean="0"/>
+              <a:rPr lang="en-US"/>
               <a:t>Click to edit Master text styles</a:t>
             </a:r>
           </a:p>
@@ -4266,38 +4271,37 @@
           <a:p>
             <a:pPr lvl="0"/>
             <a:r>
-              <a:rPr lang="en-US" smtClean="0"/>
+              <a:rPr lang="en-US"/>
               <a:t>Click to edit Master text styles</a:t>
             </a:r>
           </a:p>
           <a:p>
             <a:pPr lvl="1"/>
             <a:r>
-              <a:rPr lang="en-US" smtClean="0"/>
+              <a:rPr lang="en-US"/>
               <a:t>Second level</a:t>
             </a:r>
           </a:p>
           <a:p>
             <a:pPr lvl="2"/>
             <a:r>
-              <a:rPr lang="en-US" smtClean="0"/>
+              <a:rPr lang="en-US"/>
               <a:t>Third level</a:t>
             </a:r>
           </a:p>
           <a:p>
             <a:pPr lvl="3"/>
             <a:r>
-              <a:rPr lang="en-US" smtClean="0"/>
+              <a:rPr lang="en-US"/>
               <a:t>Fourth level</a:t>
             </a:r>
           </a:p>
           <a:p>
             <a:pPr lvl="4"/>
             <a:r>
-              <a:rPr lang="en-US" smtClean="0"/>
+              <a:rPr lang="en-US"/>
               <a:t>Fifth level</a:t>
             </a:r>
-            <a:endParaRPr lang="en-US"/>
           </a:p>
         </p:txBody>
       </p:sp>
@@ -4360,7 +4364,7 @@
           <a:p>
             <a:pPr lvl="0"/>
             <a:r>
-              <a:rPr lang="en-US" smtClean="0"/>
+              <a:rPr lang="en-US"/>
               <a:t>Click to edit Master text styles</a:t>
             </a:r>
           </a:p>
@@ -4416,38 +4420,37 @@
           <a:p>
             <a:pPr lvl="0"/>
             <a:r>
-              <a:rPr lang="en-US" smtClean="0"/>
+              <a:rPr lang="en-US"/>
               <a:t>Click to edit Master text styles</a:t>
             </a:r>
           </a:p>
           <a:p>
             <a:pPr lvl="1"/>
             <a:r>
-              <a:rPr lang="en-US" smtClean="0"/>
+              <a:rPr lang="en-US"/>
               <a:t>Second level</a:t>
             </a:r>
           </a:p>
           <a:p>
             <a:pPr lvl="2"/>
             <a:r>
-              <a:rPr lang="en-US" smtClean="0"/>
+              <a:rPr lang="en-US"/>
               <a:t>Third level</a:t>
             </a:r>
           </a:p>
           <a:p>
             <a:pPr lvl="3"/>
             <a:r>
-              <a:rPr lang="en-US" smtClean="0"/>
+              <a:rPr lang="en-US"/>
               <a:t>Fourth level</a:t>
             </a:r>
           </a:p>
           <a:p>
             <a:pPr lvl="4"/>
             <a:r>
-              <a:rPr lang="en-US" smtClean="0"/>
+              <a:rPr lang="en-US"/>
               <a:t>Fifth level</a:t>
             </a:r>
-            <a:endParaRPr lang="en-US"/>
           </a:p>
         </p:txBody>
       </p:sp>
@@ -4468,7 +4471,7 @@
           <a:p>
             <a:fld id="{5BCAD085-E8A6-8845-BD4E-CB4CCA059FC4}" type="datetimeFigureOut">
               <a:rPr lang="en-US" smtClean="0"/>
-              <a:t>1/27/13</a:t>
+              <a:t>10/29/2026</a:t>
             </a:fld>
             <a:endParaRPr lang="en-US"/>
           </a:p>
@@ -4562,10 +4565,9 @@
           <a:lstStyle/>
           <a:p>
             <a:r>
-              <a:rPr lang="en-US" smtClean="0"/>
+              <a:rPr lang="en-US"/>
               <a:t>Click to edit Master title style</a:t>
             </a:r>
-            <a:endParaRPr lang="en-US"/>
           </a:p>
         </p:txBody>
       </p:sp>
@@ -4586,7 +4588,7 @@
           <a:p>
             <a:fld id="{5BCAD085-E8A6-8845-BD4E-CB4CCA059FC4}" type="datetimeFigureOut">
               <a:rPr lang="en-US" smtClean="0"/>
-              <a:t>1/27/13</a:t>
+              <a:t>10/29/2026</a:t>
             </a:fld>
             <a:endParaRPr lang="en-US"/>
           </a:p>
@@ -4681,7 +4683,7 @@
           <a:p>
             <a:fld id="{5BCAD085-E8A6-8845-BD4E-CB4CCA059FC4}" type="datetimeFigureOut">
               <a:rPr lang="en-US" smtClean="0"/>
-              <a:t>1/27/13</a:t>
+              <a:t>10/29/2026</a:t>
             </a:fld>
             <a:endParaRPr lang="en-US"/>
           </a:p>
@@ -4784,10 +4786,9 @@
           </a:lstStyle>
           <a:p>
             <a:r>
-              <a:rPr lang="en-US" smtClean="0"/>
+              <a:rPr lang="en-US"/>
               <a:t>Click to edit Master title style</a:t>
             </a:r>
-            <a:endParaRPr lang="en-US"/>
           </a:p>
         </p:txBody>
       </p:sp>
@@ -4841,38 +4842,37 @@
           <a:p>
             <a:pPr lvl="0"/>
             <a:r>
-              <a:rPr lang="en-US" smtClean="0"/>
+              <a:rPr lang="en-US"/>
               <a:t>Click to edit Master text styles</a:t>
             </a:r>
           </a:p>
           <a:p>
             <a:pPr lvl="1"/>
             <a:r>
-              <a:rPr lang="en-US" smtClean="0"/>
+              <a:rPr lang="en-US"/>
               <a:t>Second level</a:t>
             </a:r>
           </a:p>
           <a:p>
             <a:pPr lvl="2"/>
             <a:r>
-              <a:rPr lang="en-US" smtClean="0"/>
+              <a:rPr lang="en-US"/>
               <a:t>Third level</a:t>
             </a:r>
           </a:p>
           <a:p>
             <a:pPr lvl="3"/>
             <a:r>
-              <a:rPr lang="en-US" smtClean="0"/>
+              <a:rPr lang="en-US"/>
               <a:t>Fourth level</a:t>
             </a:r>
           </a:p>
           <a:p>
             <a:pPr lvl="4"/>
             <a:r>
-              <a:rPr lang="en-US" smtClean="0"/>
+              <a:rPr lang="en-US"/>
               <a:t>Fifth level</a:t>
             </a:r>
-            <a:endParaRPr lang="en-US"/>
           </a:p>
         </p:txBody>
       </p:sp>
@@ -4935,7 +4935,7 @@
           <a:p>
             <a:pPr lvl="0"/>
             <a:r>
-              <a:rPr lang="en-US" smtClean="0"/>
+              <a:rPr lang="en-US"/>
               <a:t>Click to edit Master text styles</a:t>
             </a:r>
           </a:p>
@@ -4958,7 +4958,7 @@
           <a:p>
             <a:fld id="{5BCAD085-E8A6-8845-BD4E-CB4CCA059FC4}" type="datetimeFigureOut">
               <a:rPr lang="en-US" smtClean="0"/>
-              <a:t>1/27/13</a:t>
+              <a:t>10/29/2026</a:t>
             </a:fld>
             <a:endParaRPr lang="en-US"/>
           </a:p>
@@ -5061,10 +5061,9 @@
           </a:lstStyle>
           <a:p>
             <a:r>
-              <a:rPr lang="en-US" smtClean="0"/>
+              <a:rPr lang="en-US"/>
               <a:t>Click to edit Master title style</a:t>
             </a:r>
-            <a:endParaRPr lang="en-US"/>
           </a:p>
         </p:txBody>
       </p:sp>
@@ -5188,7 +5187,7 @@
           <a:p>
             <a:pPr lvl="0"/>
             <a:r>
-              <a:rPr lang="en-US" smtClean="0"/>
+              <a:rPr lang="en-US"/>
               <a:t>Click to edit Master text styles</a:t>
             </a:r>
           </a:p>
@@ -5211,7 +5210,7 @@
           <a:p>
             <a:fld id="{5BCAD085-E8A6-8845-BD4E-CB4CCA059FC4}" type="datetimeFigureOut">
               <a:rPr lang="en-US" smtClean="0"/>
-              <a:t>1/27/13</a:t>
+              <a:t>10/29/2026</a:t>
             </a:fld>
             <a:endParaRPr lang="en-US"/>
           </a:p>
@@ -5320,10 +5319,9 @@
           <a:lstStyle/>
           <a:p>
             <a:r>
-              <a:rPr lang="en-US" smtClean="0"/>
+              <a:rPr lang="en-US"/>
               <a:t>Click to edit Master title style</a:t>
             </a:r>
-            <a:endParaRPr lang="en-US"/>
           </a:p>
         </p:txBody>
       </p:sp>
@@ -5354,38 +5352,37 @@
           <a:p>
             <a:pPr lvl="0"/>
             <a:r>
-              <a:rPr lang="en-US" smtClean="0"/>
+              <a:rPr lang="en-US"/>
               <a:t>Click to edit Master text styles</a:t>
             </a:r>
           </a:p>
           <a:p>
             <a:pPr lvl="1"/>
             <a:r>
-              <a:rPr lang="en-US" smtClean="0"/>
+              <a:rPr lang="en-US"/>
               <a:t>Second level</a:t>
             </a:r>
           </a:p>
           <a:p>
             <a:pPr lvl="2"/>
             <a:r>
-              <a:rPr lang="en-US" smtClean="0"/>
+              <a:rPr lang="en-US"/>
               <a:t>Third level</a:t>
             </a:r>
           </a:p>
           <a:p>
             <a:pPr lvl="3"/>
             <a:r>
-              <a:rPr lang="en-US" smtClean="0"/>
+              <a:rPr lang="en-US"/>
               <a:t>Fourth level</a:t>
             </a:r>
           </a:p>
           <a:p>
             <a:pPr lvl="4"/>
             <a:r>
-              <a:rPr lang="en-US" smtClean="0"/>
+              <a:rPr lang="en-US"/>
               <a:t>Fifth level</a:t>
             </a:r>
-            <a:endParaRPr lang="en-US"/>
           </a:p>
         </p:txBody>
       </p:sp>
@@ -5424,7 +5421,7 @@
           <a:p>
             <a:fld id="{5BCAD085-E8A6-8845-BD4E-CB4CCA059FC4}" type="datetimeFigureOut">
               <a:rPr lang="en-US" smtClean="0"/>
-              <a:t>1/27/13</a:t>
+              <a:t>10/29/2026</a:t>
             </a:fld>
             <a:endParaRPr lang="en-US"/>
           </a:p>
@@ -5783,7 +5780,7 @@
 </file>
 
 <file path=ppt/slides/slide1.xml><?xml version="1.0" encoding="utf-8"?>
-<p:sld xmlns:a="http://schemas.openxmlformats.org/drawingml/2006/main" xmlns:p="http://schemas.openxmlformats.org/presentationml/2006/main" xmlns:r="http://schemas.openxmlformats.org/officeDocument/2006/relationships">
+<p:sld xmlns:a="http://schemas.openxmlformats.org/drawingml/2006/main" xmlns:r="http://schemas.openxmlformats.org/officeDocument/2006/relationships" xmlns:p="http://schemas.openxmlformats.org/presentationml/2006/main">
   <p:cSld>
     <p:spTree>
       <p:nvGrpSpPr>
@@ -5791,7 +5788,14 @@
         <p:cNvGrpSpPr/>
         <p:nvPr/>
       </p:nvGrpSpPr>
-      <p:grpSpPr/>
+      <p:grpSpPr>
+        <a:xfrm>
+          <a:off x="0" y="0"/>
+          <a:ext cx="0" cy="0"/>
+          <a:chOff x="0" y="0"/>
+          <a:chExt cx="0" cy="0"/>
+        </a:xfrm>
+      </p:grpSpPr>
       <p:sp>
         <p:nvSpPr>
           <p:cNvPr id="2" name="Rectangle 1"/>
@@ -5833,6 +5837,7 @@
           <a:lstStyle/>
           <a:p>
             <a:pPr algn="ctr"/>
+            <a:endParaRPr/>
           </a:p>
         </p:txBody>
       </p:sp>
@@ -5877,6 +5882,7 @@
           <a:lstStyle/>
           <a:p>
             <a:pPr algn="ctr"/>
+            <a:endParaRPr/>
           </a:p>
         </p:txBody>
       </p:sp>
@@ -5921,6 +5927,7 @@
           <a:lstStyle/>
           <a:p>
             <a:pPr algn="ctr"/>
+            <a:endParaRPr/>
           </a:p>
         </p:txBody>
       </p:sp>
@@ -5972,7 +5979,7 @@
         <p:spPr>
           <a:xfrm>
             <a:off x="731520" y="2377440"/>
-            <a:ext cx="10698480" cy="1554480"/>
+            <a:ext cx="10698480" cy="615553"/>
           </a:xfrm>
           <a:prstGeom prst="rect">
             <a:avLst/>
@@ -5985,20 +5992,26 @@
           </a:bodyPr>
           <a:lstStyle/>
           <a:p>
-            <a:pPr algn="l">
+            <a:pPr>
               <a:spcAft>
                 <a:spcPts val="600"/>
               </a:spcAft>
             </a:pPr>
             <a:r>
-              <a:rPr sz="3400" b="1">
+              <a:rPr lang="ko-KR" altLang="en-US" sz="3400" b="1" dirty="0">
                 <a:solidFill>
                   <a:srgbClr val="C0392B"/>
                 </a:solidFill>
                 <a:latin typeface="맑은 고딕"/>
               </a:rPr>
-              <a:t>RAC</a:t>
-            </a:r>
+              <a:t>노드 추가와 삭제</a:t>
+            </a:r>
+            <a:endParaRPr sz="3400" b="1" dirty="0">
+              <a:solidFill>
+                <a:srgbClr val="C0392B"/>
+              </a:solidFill>
+              <a:latin typeface="맑은 고딕"/>
+            </a:endParaRPr>
           </a:p>
         </p:txBody>
       </p:sp>
@@ -6089,7 +6102,7 @@
 </file>
 
 <file path=ppt/slides/slide10.xml><?xml version="1.0" encoding="utf-8"?>
-<p:sld xmlns:a="http://schemas.openxmlformats.org/drawingml/2006/main" xmlns:p="http://schemas.openxmlformats.org/presentationml/2006/main" xmlns:r="http://schemas.openxmlformats.org/officeDocument/2006/relationships">
+<p:sld xmlns:a="http://schemas.openxmlformats.org/drawingml/2006/main" xmlns:r="http://schemas.openxmlformats.org/officeDocument/2006/relationships" xmlns:p="http://schemas.openxmlformats.org/presentationml/2006/main">
   <p:cSld>
     <p:spTree>
       <p:nvGrpSpPr>
@@ -6097,7 +6110,14 @@
         <p:cNvGrpSpPr/>
         <p:nvPr/>
       </p:nvGrpSpPr>
-      <p:grpSpPr/>
+      <p:grpSpPr>
+        <a:xfrm>
+          <a:off x="0" y="0"/>
+          <a:ext cx="0" cy="0"/>
+          <a:chOff x="0" y="0"/>
+          <a:chExt cx="0" cy="0"/>
+        </a:xfrm>
+      </p:grpSpPr>
       <p:sp>
         <p:nvSpPr>
           <p:cNvPr id="2" name="Rectangle 1"/>
@@ -6139,6 +6159,7 @@
           <a:lstStyle/>
           <a:p>
             <a:pPr algn="ctr"/>
+            <a:endParaRPr/>
           </a:p>
         </p:txBody>
       </p:sp>
@@ -6332,7 +6353,7 @@
 </file>
 
 <file path=ppt/slides/slide11.xml><?xml version="1.0" encoding="utf-8"?>
-<p:sld xmlns:a="http://schemas.openxmlformats.org/drawingml/2006/main" xmlns:p="http://schemas.openxmlformats.org/presentationml/2006/main" xmlns:r="http://schemas.openxmlformats.org/officeDocument/2006/relationships">
+<p:sld xmlns:a="http://schemas.openxmlformats.org/drawingml/2006/main" xmlns:r="http://schemas.openxmlformats.org/officeDocument/2006/relationships" xmlns:p="http://schemas.openxmlformats.org/presentationml/2006/main">
   <p:cSld>
     <p:spTree>
       <p:nvGrpSpPr>
@@ -6340,7 +6361,14 @@
         <p:cNvGrpSpPr/>
         <p:nvPr/>
       </p:nvGrpSpPr>
-      <p:grpSpPr/>
+      <p:grpSpPr>
+        <a:xfrm>
+          <a:off x="0" y="0"/>
+          <a:ext cx="0" cy="0"/>
+          <a:chOff x="0" y="0"/>
+          <a:chExt cx="0" cy="0"/>
+        </a:xfrm>
+      </p:grpSpPr>
       <p:sp>
         <p:nvSpPr>
           <p:cNvPr id="2" name="Rectangle 1"/>
@@ -6382,6 +6410,7 @@
           <a:lstStyle/>
           <a:p>
             <a:pPr algn="ctr"/>
+            <a:endParaRPr/>
           </a:p>
         </p:txBody>
       </p:sp>
@@ -6575,7 +6604,7 @@
 </file>
 
 <file path=ppt/slides/slide12.xml><?xml version="1.0" encoding="utf-8"?>
-<p:sld xmlns:a="http://schemas.openxmlformats.org/drawingml/2006/main" xmlns:p="http://schemas.openxmlformats.org/presentationml/2006/main" xmlns:r="http://schemas.openxmlformats.org/officeDocument/2006/relationships">
+<p:sld xmlns:a="http://schemas.openxmlformats.org/drawingml/2006/main" xmlns:r="http://schemas.openxmlformats.org/officeDocument/2006/relationships" xmlns:p="http://schemas.openxmlformats.org/presentationml/2006/main">
   <p:cSld>
     <p:spTree>
       <p:nvGrpSpPr>
@@ -6583,7 +6612,14 @@
         <p:cNvGrpSpPr/>
         <p:nvPr/>
       </p:nvGrpSpPr>
-      <p:grpSpPr/>
+      <p:grpSpPr>
+        <a:xfrm>
+          <a:off x="0" y="0"/>
+          <a:ext cx="0" cy="0"/>
+          <a:chOff x="0" y="0"/>
+          <a:chExt cx="0" cy="0"/>
+        </a:xfrm>
+      </p:grpSpPr>
       <p:sp>
         <p:nvSpPr>
           <p:cNvPr id="2" name="Rectangle 1"/>
@@ -6625,6 +6661,7 @@
           <a:lstStyle/>
           <a:p>
             <a:pPr algn="ctr"/>
+            <a:endParaRPr/>
           </a:p>
         </p:txBody>
       </p:sp>
@@ -6818,7 +6855,7 @@
 </file>
 
 <file path=ppt/slides/slide13.xml><?xml version="1.0" encoding="utf-8"?>
-<p:sld xmlns:a="http://schemas.openxmlformats.org/drawingml/2006/main" xmlns:p="http://schemas.openxmlformats.org/presentationml/2006/main" xmlns:r="http://schemas.openxmlformats.org/officeDocument/2006/relationships">
+<p:sld xmlns:a="http://schemas.openxmlformats.org/drawingml/2006/main" xmlns:r="http://schemas.openxmlformats.org/officeDocument/2006/relationships" xmlns:p="http://schemas.openxmlformats.org/presentationml/2006/main">
   <p:cSld>
     <p:spTree>
       <p:nvGrpSpPr>
@@ -6826,7 +6863,14 @@
         <p:cNvGrpSpPr/>
         <p:nvPr/>
       </p:nvGrpSpPr>
-      <p:grpSpPr/>
+      <p:grpSpPr>
+        <a:xfrm>
+          <a:off x="0" y="0"/>
+          <a:ext cx="0" cy="0"/>
+          <a:chOff x="0" y="0"/>
+          <a:chExt cx="0" cy="0"/>
+        </a:xfrm>
+      </p:grpSpPr>
       <p:sp>
         <p:nvSpPr>
           <p:cNvPr id="2" name="Rectangle 1"/>
@@ -6868,6 +6912,7 @@
           <a:lstStyle/>
           <a:p>
             <a:pPr algn="ctr"/>
+            <a:endParaRPr/>
           </a:p>
         </p:txBody>
       </p:sp>
@@ -7061,7 +7106,7 @@
 </file>
 
 <file path=ppt/slides/slide14.xml><?xml version="1.0" encoding="utf-8"?>
-<p:sld xmlns:a="http://schemas.openxmlformats.org/drawingml/2006/main" xmlns:p="http://schemas.openxmlformats.org/presentationml/2006/main" xmlns:r="http://schemas.openxmlformats.org/officeDocument/2006/relationships">
+<p:sld xmlns:a="http://schemas.openxmlformats.org/drawingml/2006/main" xmlns:r="http://schemas.openxmlformats.org/officeDocument/2006/relationships" xmlns:p="http://schemas.openxmlformats.org/presentationml/2006/main">
   <p:cSld>
     <p:spTree>
       <p:nvGrpSpPr>
@@ -7069,7 +7114,14 @@
         <p:cNvGrpSpPr/>
         <p:nvPr/>
       </p:nvGrpSpPr>
-      <p:grpSpPr/>
+      <p:grpSpPr>
+        <a:xfrm>
+          <a:off x="0" y="0"/>
+          <a:ext cx="0" cy="0"/>
+          <a:chOff x="0" y="0"/>
+          <a:chExt cx="0" cy="0"/>
+        </a:xfrm>
+      </p:grpSpPr>
       <p:sp>
         <p:nvSpPr>
           <p:cNvPr id="2" name="Rectangle 1"/>
@@ -7111,6 +7163,7 @@
           <a:lstStyle/>
           <a:p>
             <a:pPr algn="ctr"/>
+            <a:endParaRPr/>
           </a:p>
         </p:txBody>
       </p:sp>
@@ -7233,6 +7286,7 @@
           <a:lstStyle/>
           <a:p>
             <a:pPr algn="ctr"/>
+            <a:endParaRPr/>
           </a:p>
         </p:txBody>
       </p:sp>
@@ -7316,7 +7370,7 @@
 </file>
 
 <file path=ppt/slides/slide15.xml><?xml version="1.0" encoding="utf-8"?>
-<p:sld xmlns:a="http://schemas.openxmlformats.org/drawingml/2006/main" xmlns:p="http://schemas.openxmlformats.org/presentationml/2006/main" xmlns:r="http://schemas.openxmlformats.org/officeDocument/2006/relationships">
+<p:sld xmlns:a="http://schemas.openxmlformats.org/drawingml/2006/main" xmlns:r="http://schemas.openxmlformats.org/officeDocument/2006/relationships" xmlns:p="http://schemas.openxmlformats.org/presentationml/2006/main">
   <p:cSld>
     <p:spTree>
       <p:nvGrpSpPr>
@@ -7324,7 +7378,14 @@
         <p:cNvGrpSpPr/>
         <p:nvPr/>
       </p:nvGrpSpPr>
-      <p:grpSpPr/>
+      <p:grpSpPr>
+        <a:xfrm>
+          <a:off x="0" y="0"/>
+          <a:ext cx="0" cy="0"/>
+          <a:chOff x="0" y="0"/>
+          <a:chExt cx="0" cy="0"/>
+        </a:xfrm>
+      </p:grpSpPr>
       <p:sp>
         <p:nvSpPr>
           <p:cNvPr id="2" name="Rectangle 1"/>
@@ -7366,6 +7427,7 @@
           <a:lstStyle/>
           <a:p>
             <a:pPr algn="ctr"/>
+            <a:endParaRPr/>
           </a:p>
         </p:txBody>
       </p:sp>
@@ -7559,7 +7621,7 @@
 </file>
 
 <file path=ppt/slides/slide16.xml><?xml version="1.0" encoding="utf-8"?>
-<p:sld xmlns:a="http://schemas.openxmlformats.org/drawingml/2006/main" xmlns:p="http://schemas.openxmlformats.org/presentationml/2006/main" xmlns:r="http://schemas.openxmlformats.org/officeDocument/2006/relationships">
+<p:sld xmlns:a="http://schemas.openxmlformats.org/drawingml/2006/main" xmlns:r="http://schemas.openxmlformats.org/officeDocument/2006/relationships" xmlns:p="http://schemas.openxmlformats.org/presentationml/2006/main">
   <p:cSld>
     <p:spTree>
       <p:nvGrpSpPr>
@@ -7567,7 +7629,14 @@
         <p:cNvGrpSpPr/>
         <p:nvPr/>
       </p:nvGrpSpPr>
-      <p:grpSpPr/>
+      <p:grpSpPr>
+        <a:xfrm>
+          <a:off x="0" y="0"/>
+          <a:ext cx="0" cy="0"/>
+          <a:chOff x="0" y="0"/>
+          <a:chExt cx="0" cy="0"/>
+        </a:xfrm>
+      </p:grpSpPr>
       <p:sp>
         <p:nvSpPr>
           <p:cNvPr id="2" name="Rectangle 1"/>
@@ -7609,6 +7678,7 @@
           <a:lstStyle/>
           <a:p>
             <a:pPr algn="ctr"/>
+            <a:endParaRPr/>
           </a:p>
         </p:txBody>
       </p:sp>
@@ -7802,7 +7872,7 @@
 </file>
 
 <file path=ppt/slides/slide17.xml><?xml version="1.0" encoding="utf-8"?>
-<p:sld xmlns:a="http://schemas.openxmlformats.org/drawingml/2006/main" xmlns:p="http://schemas.openxmlformats.org/presentationml/2006/main" xmlns:r="http://schemas.openxmlformats.org/officeDocument/2006/relationships">
+<p:sld xmlns:a="http://schemas.openxmlformats.org/drawingml/2006/main" xmlns:r="http://schemas.openxmlformats.org/officeDocument/2006/relationships" xmlns:p="http://schemas.openxmlformats.org/presentationml/2006/main">
   <p:cSld>
     <p:spTree>
       <p:nvGrpSpPr>
@@ -7810,7 +7880,14 @@
         <p:cNvGrpSpPr/>
         <p:nvPr/>
       </p:nvGrpSpPr>
-      <p:grpSpPr/>
+      <p:grpSpPr>
+        <a:xfrm>
+          <a:off x="0" y="0"/>
+          <a:ext cx="0" cy="0"/>
+          <a:chOff x="0" y="0"/>
+          <a:chExt cx="0" cy="0"/>
+        </a:xfrm>
+      </p:grpSpPr>
       <p:sp>
         <p:nvSpPr>
           <p:cNvPr id="2" name="Rectangle 1"/>
@@ -7852,6 +7929,7 @@
           <a:lstStyle/>
           <a:p>
             <a:pPr algn="ctr"/>
+            <a:endParaRPr/>
           </a:p>
         </p:txBody>
       </p:sp>
@@ -8045,7 +8123,7 @@
 </file>
 
 <file path=ppt/slides/slide18.xml><?xml version="1.0" encoding="utf-8"?>
-<p:sld xmlns:a="http://schemas.openxmlformats.org/drawingml/2006/main" xmlns:p="http://schemas.openxmlformats.org/presentationml/2006/main" xmlns:r="http://schemas.openxmlformats.org/officeDocument/2006/relationships">
+<p:sld xmlns:a="http://schemas.openxmlformats.org/drawingml/2006/main" xmlns:r="http://schemas.openxmlformats.org/officeDocument/2006/relationships" xmlns:p="http://schemas.openxmlformats.org/presentationml/2006/main">
   <p:cSld>
     <p:spTree>
       <p:nvGrpSpPr>
@@ -8053,7 +8131,14 @@
         <p:cNvGrpSpPr/>
         <p:nvPr/>
       </p:nvGrpSpPr>
-      <p:grpSpPr/>
+      <p:grpSpPr>
+        <a:xfrm>
+          <a:off x="0" y="0"/>
+          <a:ext cx="0" cy="0"/>
+          <a:chOff x="0" y="0"/>
+          <a:chExt cx="0" cy="0"/>
+        </a:xfrm>
+      </p:grpSpPr>
       <p:sp>
         <p:nvSpPr>
           <p:cNvPr id="2" name="Rectangle 1"/>
@@ -8095,6 +8180,7 @@
           <a:lstStyle/>
           <a:p>
             <a:pPr algn="ctr"/>
+            <a:endParaRPr/>
           </a:p>
         </p:txBody>
       </p:sp>
@@ -8288,7 +8374,7 @@
 </file>
 
 <file path=ppt/slides/slide19.xml><?xml version="1.0" encoding="utf-8"?>
-<p:sld xmlns:a="http://schemas.openxmlformats.org/drawingml/2006/main" xmlns:p="http://schemas.openxmlformats.org/presentationml/2006/main" xmlns:r="http://schemas.openxmlformats.org/officeDocument/2006/relationships">
+<p:sld xmlns:a="http://schemas.openxmlformats.org/drawingml/2006/main" xmlns:r="http://schemas.openxmlformats.org/officeDocument/2006/relationships" xmlns:p="http://schemas.openxmlformats.org/presentationml/2006/main">
   <p:cSld>
     <p:spTree>
       <p:nvGrpSpPr>
@@ -8296,7 +8382,14 @@
         <p:cNvGrpSpPr/>
         <p:nvPr/>
       </p:nvGrpSpPr>
-      <p:grpSpPr/>
+      <p:grpSpPr>
+        <a:xfrm>
+          <a:off x="0" y="0"/>
+          <a:ext cx="0" cy="0"/>
+          <a:chOff x="0" y="0"/>
+          <a:chExt cx="0" cy="0"/>
+        </a:xfrm>
+      </p:grpSpPr>
       <p:sp>
         <p:nvSpPr>
           <p:cNvPr id="2" name="Rectangle 1"/>
@@ -8338,6 +8431,7 @@
           <a:lstStyle/>
           <a:p>
             <a:pPr algn="ctr"/>
+            <a:endParaRPr/>
           </a:p>
         </p:txBody>
       </p:sp>
@@ -8531,7 +8625,7 @@
 </file>
 
 <file path=ppt/slides/slide2.xml><?xml version="1.0" encoding="utf-8"?>
-<p:sld xmlns:a="http://schemas.openxmlformats.org/drawingml/2006/main" xmlns:p="http://schemas.openxmlformats.org/presentationml/2006/main" xmlns:r="http://schemas.openxmlformats.org/officeDocument/2006/relationships">
+<p:sld xmlns:a="http://schemas.openxmlformats.org/drawingml/2006/main" xmlns:r="http://schemas.openxmlformats.org/officeDocument/2006/relationships" xmlns:p="http://schemas.openxmlformats.org/presentationml/2006/main">
   <p:cSld>
     <p:spTree>
       <p:nvGrpSpPr>
@@ -8539,7 +8633,14 @@
         <p:cNvGrpSpPr/>
         <p:nvPr/>
       </p:nvGrpSpPr>
-      <p:grpSpPr/>
+      <p:grpSpPr>
+        <a:xfrm>
+          <a:off x="0" y="0"/>
+          <a:ext cx="0" cy="0"/>
+          <a:chOff x="0" y="0"/>
+          <a:chExt cx="0" cy="0"/>
+        </a:xfrm>
+      </p:grpSpPr>
       <p:sp>
         <p:nvSpPr>
           <p:cNvPr id="2" name="Rectangle 1"/>
@@ -8581,6 +8682,7 @@
           <a:lstStyle/>
           <a:p>
             <a:pPr algn="ctr"/>
+            <a:endParaRPr/>
           </a:p>
         </p:txBody>
       </p:sp>
@@ -8751,7 +8853,7 @@
 </file>
 
 <file path=ppt/slides/slide20.xml><?xml version="1.0" encoding="utf-8"?>
-<p:sld xmlns:a="http://schemas.openxmlformats.org/drawingml/2006/main" xmlns:p="http://schemas.openxmlformats.org/presentationml/2006/main" xmlns:r="http://schemas.openxmlformats.org/officeDocument/2006/relationships">
+<p:sld xmlns:a="http://schemas.openxmlformats.org/drawingml/2006/main" xmlns:r="http://schemas.openxmlformats.org/officeDocument/2006/relationships" xmlns:p="http://schemas.openxmlformats.org/presentationml/2006/main">
   <p:cSld>
     <p:spTree>
       <p:nvGrpSpPr>
@@ -8759,7 +8861,14 @@
         <p:cNvGrpSpPr/>
         <p:nvPr/>
       </p:nvGrpSpPr>
-      <p:grpSpPr/>
+      <p:grpSpPr>
+        <a:xfrm>
+          <a:off x="0" y="0"/>
+          <a:ext cx="0" cy="0"/>
+          <a:chOff x="0" y="0"/>
+          <a:chExt cx="0" cy="0"/>
+        </a:xfrm>
+      </p:grpSpPr>
       <p:sp>
         <p:nvSpPr>
           <p:cNvPr id="2" name="Rectangle 1"/>
@@ -8801,6 +8910,7 @@
           <a:lstStyle/>
           <a:p>
             <a:pPr algn="ctr"/>
+            <a:endParaRPr/>
           </a:p>
         </p:txBody>
       </p:sp>
@@ -8994,7 +9104,7 @@
 </file>
 
 <file path=ppt/slides/slide21.xml><?xml version="1.0" encoding="utf-8"?>
-<p:sld xmlns:a="http://schemas.openxmlformats.org/drawingml/2006/main" xmlns:p="http://schemas.openxmlformats.org/presentationml/2006/main" xmlns:r="http://schemas.openxmlformats.org/officeDocument/2006/relationships">
+<p:sld xmlns:a="http://schemas.openxmlformats.org/drawingml/2006/main" xmlns:r="http://schemas.openxmlformats.org/officeDocument/2006/relationships" xmlns:p="http://schemas.openxmlformats.org/presentationml/2006/main">
   <p:cSld>
     <p:spTree>
       <p:nvGrpSpPr>
@@ -9002,7 +9112,14 @@
         <p:cNvGrpSpPr/>
         <p:nvPr/>
       </p:nvGrpSpPr>
-      <p:grpSpPr/>
+      <p:grpSpPr>
+        <a:xfrm>
+          <a:off x="0" y="0"/>
+          <a:ext cx="0" cy="0"/>
+          <a:chOff x="0" y="0"/>
+          <a:chExt cx="0" cy="0"/>
+        </a:xfrm>
+      </p:grpSpPr>
       <p:sp>
         <p:nvSpPr>
           <p:cNvPr id="2" name="Rectangle 1"/>
@@ -9044,6 +9161,7 @@
           <a:lstStyle/>
           <a:p>
             <a:pPr algn="ctr"/>
+            <a:endParaRPr/>
           </a:p>
         </p:txBody>
       </p:sp>
@@ -9237,7 +9355,7 @@
 </file>
 
 <file path=ppt/slides/slide22.xml><?xml version="1.0" encoding="utf-8"?>
-<p:sld xmlns:a="http://schemas.openxmlformats.org/drawingml/2006/main" xmlns:p="http://schemas.openxmlformats.org/presentationml/2006/main" xmlns:r="http://schemas.openxmlformats.org/officeDocument/2006/relationships">
+<p:sld xmlns:a="http://schemas.openxmlformats.org/drawingml/2006/main" xmlns:r="http://schemas.openxmlformats.org/officeDocument/2006/relationships" xmlns:p="http://schemas.openxmlformats.org/presentationml/2006/main">
   <p:cSld>
     <p:spTree>
       <p:nvGrpSpPr>
@@ -9245,7 +9363,14 @@
         <p:cNvGrpSpPr/>
         <p:nvPr/>
       </p:nvGrpSpPr>
-      <p:grpSpPr/>
+      <p:grpSpPr>
+        <a:xfrm>
+          <a:off x="0" y="0"/>
+          <a:ext cx="0" cy="0"/>
+          <a:chOff x="0" y="0"/>
+          <a:chExt cx="0" cy="0"/>
+        </a:xfrm>
+      </p:grpSpPr>
       <p:sp>
         <p:nvSpPr>
           <p:cNvPr id="2" name="Rectangle 1"/>
@@ -9287,6 +9412,7 @@
           <a:lstStyle/>
           <a:p>
             <a:pPr algn="ctr"/>
+            <a:endParaRPr/>
           </a:p>
         </p:txBody>
       </p:sp>
@@ -9409,6 +9535,7 @@
           <a:lstStyle/>
           <a:p>
             <a:pPr algn="ctr"/>
+            <a:endParaRPr/>
           </a:p>
         </p:txBody>
       </p:sp>
@@ -9492,7 +9619,7 @@
 </file>
 
 <file path=ppt/slides/slide23.xml><?xml version="1.0" encoding="utf-8"?>
-<p:sld xmlns:a="http://schemas.openxmlformats.org/drawingml/2006/main" xmlns:p="http://schemas.openxmlformats.org/presentationml/2006/main" xmlns:r="http://schemas.openxmlformats.org/officeDocument/2006/relationships">
+<p:sld xmlns:a="http://schemas.openxmlformats.org/drawingml/2006/main" xmlns:r="http://schemas.openxmlformats.org/officeDocument/2006/relationships" xmlns:p="http://schemas.openxmlformats.org/presentationml/2006/main">
   <p:cSld>
     <p:spTree>
       <p:nvGrpSpPr>
@@ -9500,7 +9627,14 @@
         <p:cNvGrpSpPr/>
         <p:nvPr/>
       </p:nvGrpSpPr>
-      <p:grpSpPr/>
+      <p:grpSpPr>
+        <a:xfrm>
+          <a:off x="0" y="0"/>
+          <a:ext cx="0" cy="0"/>
+          <a:chOff x="0" y="0"/>
+          <a:chExt cx="0" cy="0"/>
+        </a:xfrm>
+      </p:grpSpPr>
       <p:sp>
         <p:nvSpPr>
           <p:cNvPr id="2" name="Rectangle 1"/>
@@ -9542,6 +9676,7 @@
           <a:lstStyle/>
           <a:p>
             <a:pPr algn="ctr"/>
+            <a:endParaRPr/>
           </a:p>
         </p:txBody>
       </p:sp>
@@ -9735,7 +9870,7 @@
 </file>
 
 <file path=ppt/slides/slide24.xml><?xml version="1.0" encoding="utf-8"?>
-<p:sld xmlns:a="http://schemas.openxmlformats.org/drawingml/2006/main" xmlns:p="http://schemas.openxmlformats.org/presentationml/2006/main" xmlns:r="http://schemas.openxmlformats.org/officeDocument/2006/relationships">
+<p:sld xmlns:a="http://schemas.openxmlformats.org/drawingml/2006/main" xmlns:r="http://schemas.openxmlformats.org/officeDocument/2006/relationships" xmlns:p="http://schemas.openxmlformats.org/presentationml/2006/main">
   <p:cSld>
     <p:spTree>
       <p:nvGrpSpPr>
@@ -9743,7 +9878,14 @@
         <p:cNvGrpSpPr/>
         <p:nvPr/>
       </p:nvGrpSpPr>
-      <p:grpSpPr/>
+      <p:grpSpPr>
+        <a:xfrm>
+          <a:off x="0" y="0"/>
+          <a:ext cx="0" cy="0"/>
+          <a:chOff x="0" y="0"/>
+          <a:chExt cx="0" cy="0"/>
+        </a:xfrm>
+      </p:grpSpPr>
       <p:sp>
         <p:nvSpPr>
           <p:cNvPr id="2" name="Rectangle 1"/>
@@ -9785,6 +9927,7 @@
           <a:lstStyle/>
           <a:p>
             <a:pPr algn="ctr"/>
+            <a:endParaRPr/>
           </a:p>
         </p:txBody>
       </p:sp>
@@ -9978,7 +10121,7 @@
 </file>
 
 <file path=ppt/slides/slide25.xml><?xml version="1.0" encoding="utf-8"?>
-<p:sld xmlns:a="http://schemas.openxmlformats.org/drawingml/2006/main" xmlns:p="http://schemas.openxmlformats.org/presentationml/2006/main" xmlns:r="http://schemas.openxmlformats.org/officeDocument/2006/relationships">
+<p:sld xmlns:a="http://schemas.openxmlformats.org/drawingml/2006/main" xmlns:r="http://schemas.openxmlformats.org/officeDocument/2006/relationships" xmlns:p="http://schemas.openxmlformats.org/presentationml/2006/main">
   <p:cSld>
     <p:spTree>
       <p:nvGrpSpPr>
@@ -9986,7 +10129,14 @@
         <p:cNvGrpSpPr/>
         <p:nvPr/>
       </p:nvGrpSpPr>
-      <p:grpSpPr/>
+      <p:grpSpPr>
+        <a:xfrm>
+          <a:off x="0" y="0"/>
+          <a:ext cx="0" cy="0"/>
+          <a:chOff x="0" y="0"/>
+          <a:chExt cx="0" cy="0"/>
+        </a:xfrm>
+      </p:grpSpPr>
       <p:sp>
         <p:nvSpPr>
           <p:cNvPr id="2" name="Rectangle 1"/>
@@ -10028,6 +10178,7 @@
           <a:lstStyle/>
           <a:p>
             <a:pPr algn="ctr"/>
+            <a:endParaRPr/>
           </a:p>
         </p:txBody>
       </p:sp>
@@ -10150,6 +10301,7 @@
           <a:lstStyle/>
           <a:p>
             <a:pPr algn="ctr"/>
+            <a:endParaRPr/>
           </a:p>
         </p:txBody>
       </p:sp>
@@ -10233,7 +10385,7 @@
 </file>
 
 <file path=ppt/slides/slide26.xml><?xml version="1.0" encoding="utf-8"?>
-<p:sld xmlns:a="http://schemas.openxmlformats.org/drawingml/2006/main" xmlns:p="http://schemas.openxmlformats.org/presentationml/2006/main" xmlns:r="http://schemas.openxmlformats.org/officeDocument/2006/relationships">
+<p:sld xmlns:a="http://schemas.openxmlformats.org/drawingml/2006/main" xmlns:r="http://schemas.openxmlformats.org/officeDocument/2006/relationships" xmlns:p="http://schemas.openxmlformats.org/presentationml/2006/main">
   <p:cSld>
     <p:spTree>
       <p:nvGrpSpPr>
@@ -10241,7 +10393,14 @@
         <p:cNvGrpSpPr/>
         <p:nvPr/>
       </p:nvGrpSpPr>
-      <p:grpSpPr/>
+      <p:grpSpPr>
+        <a:xfrm>
+          <a:off x="0" y="0"/>
+          <a:ext cx="0" cy="0"/>
+          <a:chOff x="0" y="0"/>
+          <a:chExt cx="0" cy="0"/>
+        </a:xfrm>
+      </p:grpSpPr>
       <p:sp>
         <p:nvSpPr>
           <p:cNvPr id="2" name="Rectangle 1"/>
@@ -10283,6 +10442,7 @@
           <a:lstStyle/>
           <a:p>
             <a:pPr algn="ctr"/>
+            <a:endParaRPr/>
           </a:p>
         </p:txBody>
       </p:sp>
@@ -10476,7 +10636,7 @@
 </file>
 
 <file path=ppt/slides/slide27.xml><?xml version="1.0" encoding="utf-8"?>
-<p:sld xmlns:a="http://schemas.openxmlformats.org/drawingml/2006/main" xmlns:p="http://schemas.openxmlformats.org/presentationml/2006/main" xmlns:r="http://schemas.openxmlformats.org/officeDocument/2006/relationships">
+<p:sld xmlns:a="http://schemas.openxmlformats.org/drawingml/2006/main" xmlns:r="http://schemas.openxmlformats.org/officeDocument/2006/relationships" xmlns:p="http://schemas.openxmlformats.org/presentationml/2006/main">
   <p:cSld>
     <p:spTree>
       <p:nvGrpSpPr>
@@ -10484,7 +10644,14 @@
         <p:cNvGrpSpPr/>
         <p:nvPr/>
       </p:nvGrpSpPr>
-      <p:grpSpPr/>
+      <p:grpSpPr>
+        <a:xfrm>
+          <a:off x="0" y="0"/>
+          <a:ext cx="0" cy="0"/>
+          <a:chOff x="0" y="0"/>
+          <a:chExt cx="0" cy="0"/>
+        </a:xfrm>
+      </p:grpSpPr>
       <p:sp>
         <p:nvSpPr>
           <p:cNvPr id="2" name="Rectangle 1"/>
@@ -10526,6 +10693,7 @@
           <a:lstStyle/>
           <a:p>
             <a:pPr algn="ctr"/>
+            <a:endParaRPr/>
           </a:p>
         </p:txBody>
       </p:sp>
@@ -10719,7 +10887,7 @@
 </file>
 
 <file path=ppt/slides/slide28.xml><?xml version="1.0" encoding="utf-8"?>
-<p:sld xmlns:a="http://schemas.openxmlformats.org/drawingml/2006/main" xmlns:p="http://schemas.openxmlformats.org/presentationml/2006/main" xmlns:r="http://schemas.openxmlformats.org/officeDocument/2006/relationships">
+<p:sld xmlns:a="http://schemas.openxmlformats.org/drawingml/2006/main" xmlns:r="http://schemas.openxmlformats.org/officeDocument/2006/relationships" xmlns:p="http://schemas.openxmlformats.org/presentationml/2006/main">
   <p:cSld>
     <p:spTree>
       <p:nvGrpSpPr>
@@ -10727,7 +10895,14 @@
         <p:cNvGrpSpPr/>
         <p:nvPr/>
       </p:nvGrpSpPr>
-      <p:grpSpPr/>
+      <p:grpSpPr>
+        <a:xfrm>
+          <a:off x="0" y="0"/>
+          <a:ext cx="0" cy="0"/>
+          <a:chOff x="0" y="0"/>
+          <a:chExt cx="0" cy="0"/>
+        </a:xfrm>
+      </p:grpSpPr>
       <p:sp>
         <p:nvSpPr>
           <p:cNvPr id="2" name="Rectangle 1"/>
@@ -10769,6 +10944,7 @@
           <a:lstStyle/>
           <a:p>
             <a:pPr algn="ctr"/>
+            <a:endParaRPr/>
           </a:p>
         </p:txBody>
       </p:sp>
@@ -10962,7 +11138,7 @@
 </file>
 
 <file path=ppt/slides/slide29.xml><?xml version="1.0" encoding="utf-8"?>
-<p:sld xmlns:a="http://schemas.openxmlformats.org/drawingml/2006/main" xmlns:p="http://schemas.openxmlformats.org/presentationml/2006/main" xmlns:r="http://schemas.openxmlformats.org/officeDocument/2006/relationships">
+<p:sld xmlns:a="http://schemas.openxmlformats.org/drawingml/2006/main" xmlns:r="http://schemas.openxmlformats.org/officeDocument/2006/relationships" xmlns:p="http://schemas.openxmlformats.org/presentationml/2006/main">
   <p:cSld>
     <p:spTree>
       <p:nvGrpSpPr>
@@ -10970,7 +11146,14 @@
         <p:cNvGrpSpPr/>
         <p:nvPr/>
       </p:nvGrpSpPr>
-      <p:grpSpPr/>
+      <p:grpSpPr>
+        <a:xfrm>
+          <a:off x="0" y="0"/>
+          <a:ext cx="0" cy="0"/>
+          <a:chOff x="0" y="0"/>
+          <a:chExt cx="0" cy="0"/>
+        </a:xfrm>
+      </p:grpSpPr>
       <p:sp>
         <p:nvSpPr>
           <p:cNvPr id="2" name="Rectangle 1"/>
@@ -11012,6 +11195,7 @@
           <a:lstStyle/>
           <a:p>
             <a:pPr algn="ctr"/>
+            <a:endParaRPr/>
           </a:p>
         </p:txBody>
       </p:sp>
@@ -11134,6 +11318,7 @@
           <a:lstStyle/>
           <a:p>
             <a:pPr algn="ctr"/>
+            <a:endParaRPr/>
           </a:p>
         </p:txBody>
       </p:sp>
@@ -11217,7 +11402,7 @@
 </file>
 
 <file path=ppt/slides/slide3.xml><?xml version="1.0" encoding="utf-8"?>
-<p:sld xmlns:a="http://schemas.openxmlformats.org/drawingml/2006/main" xmlns:p="http://schemas.openxmlformats.org/presentationml/2006/main" xmlns:r="http://schemas.openxmlformats.org/officeDocument/2006/relationships">
+<p:sld xmlns:a="http://schemas.openxmlformats.org/drawingml/2006/main" xmlns:r="http://schemas.openxmlformats.org/officeDocument/2006/relationships" xmlns:p="http://schemas.openxmlformats.org/presentationml/2006/main">
   <p:cSld>
     <p:spTree>
       <p:nvGrpSpPr>
@@ -11225,7 +11410,14 @@
         <p:cNvGrpSpPr/>
         <p:nvPr/>
       </p:nvGrpSpPr>
-      <p:grpSpPr/>
+      <p:grpSpPr>
+        <a:xfrm>
+          <a:off x="0" y="0"/>
+          <a:ext cx="0" cy="0"/>
+          <a:chOff x="0" y="0"/>
+          <a:chExt cx="0" cy="0"/>
+        </a:xfrm>
+      </p:grpSpPr>
       <p:sp>
         <p:nvSpPr>
           <p:cNvPr id="2" name="Rectangle 1"/>
@@ -11267,6 +11459,7 @@
           <a:lstStyle/>
           <a:p>
             <a:pPr algn="ctr"/>
+            <a:endParaRPr/>
           </a:p>
         </p:txBody>
       </p:sp>
@@ -11485,7 +11678,7 @@
 </file>
 
 <file path=ppt/slides/slide30.xml><?xml version="1.0" encoding="utf-8"?>
-<p:sld xmlns:a="http://schemas.openxmlformats.org/drawingml/2006/main" xmlns:p="http://schemas.openxmlformats.org/presentationml/2006/main" xmlns:r="http://schemas.openxmlformats.org/officeDocument/2006/relationships">
+<p:sld xmlns:a="http://schemas.openxmlformats.org/drawingml/2006/main" xmlns:r="http://schemas.openxmlformats.org/officeDocument/2006/relationships" xmlns:p="http://schemas.openxmlformats.org/presentationml/2006/main">
   <p:cSld>
     <p:spTree>
       <p:nvGrpSpPr>
@@ -11493,7 +11686,14 @@
         <p:cNvGrpSpPr/>
         <p:nvPr/>
       </p:nvGrpSpPr>
-      <p:grpSpPr/>
+      <p:grpSpPr>
+        <a:xfrm>
+          <a:off x="0" y="0"/>
+          <a:ext cx="0" cy="0"/>
+          <a:chOff x="0" y="0"/>
+          <a:chExt cx="0" cy="0"/>
+        </a:xfrm>
+      </p:grpSpPr>
       <p:sp>
         <p:nvSpPr>
           <p:cNvPr id="2" name="Rectangle 1"/>
@@ -11535,6 +11735,7 @@
           <a:lstStyle/>
           <a:p>
             <a:pPr algn="ctr"/>
+            <a:endParaRPr/>
           </a:p>
         </p:txBody>
       </p:sp>
@@ -11728,7 +11929,7 @@
 </file>
 
 <file path=ppt/slides/slide31.xml><?xml version="1.0" encoding="utf-8"?>
-<p:sld xmlns:a="http://schemas.openxmlformats.org/drawingml/2006/main" xmlns:p="http://schemas.openxmlformats.org/presentationml/2006/main" xmlns:r="http://schemas.openxmlformats.org/officeDocument/2006/relationships">
+<p:sld xmlns:a="http://schemas.openxmlformats.org/drawingml/2006/main" xmlns:r="http://schemas.openxmlformats.org/officeDocument/2006/relationships" xmlns:p="http://schemas.openxmlformats.org/presentationml/2006/main">
   <p:cSld>
     <p:spTree>
       <p:nvGrpSpPr>
@@ -11736,7 +11937,14 @@
         <p:cNvGrpSpPr/>
         <p:nvPr/>
       </p:nvGrpSpPr>
-      <p:grpSpPr/>
+      <p:grpSpPr>
+        <a:xfrm>
+          <a:off x="0" y="0"/>
+          <a:ext cx="0" cy="0"/>
+          <a:chOff x="0" y="0"/>
+          <a:chExt cx="0" cy="0"/>
+        </a:xfrm>
+      </p:grpSpPr>
       <p:sp>
         <p:nvSpPr>
           <p:cNvPr id="2" name="Rectangle 1"/>
@@ -11778,6 +11986,7 @@
           <a:lstStyle/>
           <a:p>
             <a:pPr algn="ctr"/>
+            <a:endParaRPr/>
           </a:p>
         </p:txBody>
       </p:sp>
@@ -11971,7 +12180,7 @@
 </file>
 
 <file path=ppt/slides/slide32.xml><?xml version="1.0" encoding="utf-8"?>
-<p:sld xmlns:a="http://schemas.openxmlformats.org/drawingml/2006/main" xmlns:p="http://schemas.openxmlformats.org/presentationml/2006/main" xmlns:r="http://schemas.openxmlformats.org/officeDocument/2006/relationships">
+<p:sld xmlns:a="http://schemas.openxmlformats.org/drawingml/2006/main" xmlns:r="http://schemas.openxmlformats.org/officeDocument/2006/relationships" xmlns:p="http://schemas.openxmlformats.org/presentationml/2006/main">
   <p:cSld>
     <p:spTree>
       <p:nvGrpSpPr>
@@ -11979,7 +12188,14 @@
         <p:cNvGrpSpPr/>
         <p:nvPr/>
       </p:nvGrpSpPr>
-      <p:grpSpPr/>
+      <p:grpSpPr>
+        <a:xfrm>
+          <a:off x="0" y="0"/>
+          <a:ext cx="0" cy="0"/>
+          <a:chOff x="0" y="0"/>
+          <a:chExt cx="0" cy="0"/>
+        </a:xfrm>
+      </p:grpSpPr>
       <p:sp>
         <p:nvSpPr>
           <p:cNvPr id="2" name="Rectangle 1"/>
@@ -12021,6 +12237,7 @@
           <a:lstStyle/>
           <a:p>
             <a:pPr algn="ctr"/>
+            <a:endParaRPr/>
           </a:p>
         </p:txBody>
       </p:sp>
@@ -12214,7 +12431,7 @@
 </file>
 
 <file path=ppt/slides/slide33.xml><?xml version="1.0" encoding="utf-8"?>
-<p:sld xmlns:a="http://schemas.openxmlformats.org/drawingml/2006/main" xmlns:p="http://schemas.openxmlformats.org/presentationml/2006/main" xmlns:r="http://schemas.openxmlformats.org/officeDocument/2006/relationships">
+<p:sld xmlns:a="http://schemas.openxmlformats.org/drawingml/2006/main" xmlns:r="http://schemas.openxmlformats.org/officeDocument/2006/relationships" xmlns:p="http://schemas.openxmlformats.org/presentationml/2006/main">
   <p:cSld>
     <p:spTree>
       <p:nvGrpSpPr>
@@ -12222,7 +12439,14 @@
         <p:cNvGrpSpPr/>
         <p:nvPr/>
       </p:nvGrpSpPr>
-      <p:grpSpPr/>
+      <p:grpSpPr>
+        <a:xfrm>
+          <a:off x="0" y="0"/>
+          <a:ext cx="0" cy="0"/>
+          <a:chOff x="0" y="0"/>
+          <a:chExt cx="0" cy="0"/>
+        </a:xfrm>
+      </p:grpSpPr>
       <p:sp>
         <p:nvSpPr>
           <p:cNvPr id="2" name="Rectangle 1"/>
@@ -12264,6 +12488,7 @@
           <a:lstStyle/>
           <a:p>
             <a:pPr algn="ctr"/>
+            <a:endParaRPr/>
           </a:p>
         </p:txBody>
       </p:sp>
@@ -12457,7 +12682,7 @@
 </file>
 
 <file path=ppt/slides/slide34.xml><?xml version="1.0" encoding="utf-8"?>
-<p:sld xmlns:a="http://schemas.openxmlformats.org/drawingml/2006/main" xmlns:p="http://schemas.openxmlformats.org/presentationml/2006/main" xmlns:r="http://schemas.openxmlformats.org/officeDocument/2006/relationships">
+<p:sld xmlns:a="http://schemas.openxmlformats.org/drawingml/2006/main" xmlns:r="http://schemas.openxmlformats.org/officeDocument/2006/relationships" xmlns:p="http://schemas.openxmlformats.org/presentationml/2006/main">
   <p:cSld>
     <p:spTree>
       <p:nvGrpSpPr>
@@ -12465,7 +12690,14 @@
         <p:cNvGrpSpPr/>
         <p:nvPr/>
       </p:nvGrpSpPr>
-      <p:grpSpPr/>
+      <p:grpSpPr>
+        <a:xfrm>
+          <a:off x="0" y="0"/>
+          <a:ext cx="0" cy="0"/>
+          <a:chOff x="0" y="0"/>
+          <a:chExt cx="0" cy="0"/>
+        </a:xfrm>
+      </p:grpSpPr>
       <p:sp>
         <p:nvSpPr>
           <p:cNvPr id="2" name="Rectangle 1"/>
@@ -12507,6 +12739,7 @@
           <a:lstStyle/>
           <a:p>
             <a:pPr algn="ctr"/>
+            <a:endParaRPr/>
           </a:p>
         </p:txBody>
       </p:sp>
@@ -12629,6 +12862,7 @@
           <a:lstStyle/>
           <a:p>
             <a:pPr algn="ctr"/>
+            <a:endParaRPr/>
           </a:p>
         </p:txBody>
       </p:sp>
@@ -12696,7 +12930,7 @@
 </file>
 
 <file path=ppt/slides/slide35.xml><?xml version="1.0" encoding="utf-8"?>
-<p:sld xmlns:a="http://schemas.openxmlformats.org/drawingml/2006/main" xmlns:p="http://schemas.openxmlformats.org/presentationml/2006/main" xmlns:r="http://schemas.openxmlformats.org/officeDocument/2006/relationships">
+<p:sld xmlns:a="http://schemas.openxmlformats.org/drawingml/2006/main" xmlns:r="http://schemas.openxmlformats.org/officeDocument/2006/relationships" xmlns:p="http://schemas.openxmlformats.org/presentationml/2006/main">
   <p:cSld>
     <p:spTree>
       <p:nvGrpSpPr>
@@ -12704,7 +12938,14 @@
         <p:cNvGrpSpPr/>
         <p:nvPr/>
       </p:nvGrpSpPr>
-      <p:grpSpPr/>
+      <p:grpSpPr>
+        <a:xfrm>
+          <a:off x="0" y="0"/>
+          <a:ext cx="0" cy="0"/>
+          <a:chOff x="0" y="0"/>
+          <a:chExt cx="0" cy="0"/>
+        </a:xfrm>
+      </p:grpSpPr>
       <p:sp>
         <p:nvSpPr>
           <p:cNvPr id="2" name="Rectangle 1"/>
@@ -12746,6 +12987,7 @@
           <a:lstStyle/>
           <a:p>
             <a:pPr algn="ctr"/>
+            <a:endParaRPr/>
           </a:p>
         </p:txBody>
       </p:sp>
@@ -12939,7 +13181,7 @@
 </file>
 
 <file path=ppt/slides/slide36.xml><?xml version="1.0" encoding="utf-8"?>
-<p:sld xmlns:a="http://schemas.openxmlformats.org/drawingml/2006/main" xmlns:p="http://schemas.openxmlformats.org/presentationml/2006/main" xmlns:r="http://schemas.openxmlformats.org/officeDocument/2006/relationships">
+<p:sld xmlns:a="http://schemas.openxmlformats.org/drawingml/2006/main" xmlns:r="http://schemas.openxmlformats.org/officeDocument/2006/relationships" xmlns:p="http://schemas.openxmlformats.org/presentationml/2006/main">
   <p:cSld>
     <p:spTree>
       <p:nvGrpSpPr>
@@ -12947,7 +13189,14 @@
         <p:cNvGrpSpPr/>
         <p:nvPr/>
       </p:nvGrpSpPr>
-      <p:grpSpPr/>
+      <p:grpSpPr>
+        <a:xfrm>
+          <a:off x="0" y="0"/>
+          <a:ext cx="0" cy="0"/>
+          <a:chOff x="0" y="0"/>
+          <a:chExt cx="0" cy="0"/>
+        </a:xfrm>
+      </p:grpSpPr>
       <p:sp>
         <p:nvSpPr>
           <p:cNvPr id="2" name="Rectangle 1"/>
@@ -12989,6 +13238,7 @@
           <a:lstStyle/>
           <a:p>
             <a:pPr algn="ctr"/>
+            <a:endParaRPr/>
           </a:p>
         </p:txBody>
       </p:sp>
@@ -13182,7 +13432,7 @@
 </file>
 
 <file path=ppt/slides/slide37.xml><?xml version="1.0" encoding="utf-8"?>
-<p:sld xmlns:a="http://schemas.openxmlformats.org/drawingml/2006/main" xmlns:p="http://schemas.openxmlformats.org/presentationml/2006/main" xmlns:r="http://schemas.openxmlformats.org/officeDocument/2006/relationships">
+<p:sld xmlns:a="http://schemas.openxmlformats.org/drawingml/2006/main" xmlns:r="http://schemas.openxmlformats.org/officeDocument/2006/relationships" xmlns:p="http://schemas.openxmlformats.org/presentationml/2006/main">
   <p:cSld>
     <p:spTree>
       <p:nvGrpSpPr>
@@ -13190,7 +13440,14 @@
         <p:cNvGrpSpPr/>
         <p:nvPr/>
       </p:nvGrpSpPr>
-      <p:grpSpPr/>
+      <p:grpSpPr>
+        <a:xfrm>
+          <a:off x="0" y="0"/>
+          <a:ext cx="0" cy="0"/>
+          <a:chOff x="0" y="0"/>
+          <a:chExt cx="0" cy="0"/>
+        </a:xfrm>
+      </p:grpSpPr>
       <p:sp>
         <p:nvSpPr>
           <p:cNvPr id="2" name="Rectangle 1"/>
@@ -13232,6 +13489,7 @@
           <a:lstStyle/>
           <a:p>
             <a:pPr algn="ctr"/>
+            <a:endParaRPr/>
           </a:p>
         </p:txBody>
       </p:sp>
@@ -13354,6 +13612,7 @@
           <a:lstStyle/>
           <a:p>
             <a:pPr algn="ctr"/>
+            <a:endParaRPr/>
           </a:p>
         </p:txBody>
       </p:sp>
@@ -13437,7 +13696,7 @@
 </file>
 
 <file path=ppt/slides/slide38.xml><?xml version="1.0" encoding="utf-8"?>
-<p:sld xmlns:a="http://schemas.openxmlformats.org/drawingml/2006/main" xmlns:p="http://schemas.openxmlformats.org/presentationml/2006/main" xmlns:r="http://schemas.openxmlformats.org/officeDocument/2006/relationships">
+<p:sld xmlns:a="http://schemas.openxmlformats.org/drawingml/2006/main" xmlns:r="http://schemas.openxmlformats.org/officeDocument/2006/relationships" xmlns:p="http://schemas.openxmlformats.org/presentationml/2006/main">
   <p:cSld>
     <p:spTree>
       <p:nvGrpSpPr>
@@ -13445,7 +13704,14 @@
         <p:cNvGrpSpPr/>
         <p:nvPr/>
       </p:nvGrpSpPr>
-      <p:grpSpPr/>
+      <p:grpSpPr>
+        <a:xfrm>
+          <a:off x="0" y="0"/>
+          <a:ext cx="0" cy="0"/>
+          <a:chOff x="0" y="0"/>
+          <a:chExt cx="0" cy="0"/>
+        </a:xfrm>
+      </p:grpSpPr>
       <p:sp>
         <p:nvSpPr>
           <p:cNvPr id="2" name="Rectangle 1"/>
@@ -13487,6 +13753,7 @@
           <a:lstStyle/>
           <a:p>
             <a:pPr algn="ctr"/>
+            <a:endParaRPr/>
           </a:p>
         </p:txBody>
       </p:sp>
@@ -13680,7 +13947,7 @@
 </file>
 
 <file path=ppt/slides/slide39.xml><?xml version="1.0" encoding="utf-8"?>
-<p:sld xmlns:a="http://schemas.openxmlformats.org/drawingml/2006/main" xmlns:p="http://schemas.openxmlformats.org/presentationml/2006/main" xmlns:r="http://schemas.openxmlformats.org/officeDocument/2006/relationships">
+<p:sld xmlns:a="http://schemas.openxmlformats.org/drawingml/2006/main" xmlns:r="http://schemas.openxmlformats.org/officeDocument/2006/relationships" xmlns:p="http://schemas.openxmlformats.org/presentationml/2006/main">
   <p:cSld>
     <p:spTree>
       <p:nvGrpSpPr>
@@ -13688,7 +13955,14 @@
         <p:cNvGrpSpPr/>
         <p:nvPr/>
       </p:nvGrpSpPr>
-      <p:grpSpPr/>
+      <p:grpSpPr>
+        <a:xfrm>
+          <a:off x="0" y="0"/>
+          <a:ext cx="0" cy="0"/>
+          <a:chOff x="0" y="0"/>
+          <a:chExt cx="0" cy="0"/>
+        </a:xfrm>
+      </p:grpSpPr>
       <p:sp>
         <p:nvSpPr>
           <p:cNvPr id="2" name="Rectangle 1"/>
@@ -13730,6 +14004,7 @@
           <a:lstStyle/>
           <a:p>
             <a:pPr algn="ctr"/>
+            <a:endParaRPr/>
           </a:p>
         </p:txBody>
       </p:sp>
@@ -13923,7 +14198,7 @@
 </file>
 
 <file path=ppt/slides/slide4.xml><?xml version="1.0" encoding="utf-8"?>
-<p:sld xmlns:a="http://schemas.openxmlformats.org/drawingml/2006/main" xmlns:p="http://schemas.openxmlformats.org/presentationml/2006/main" xmlns:r="http://schemas.openxmlformats.org/officeDocument/2006/relationships">
+<p:sld xmlns:a="http://schemas.openxmlformats.org/drawingml/2006/main" xmlns:r="http://schemas.openxmlformats.org/officeDocument/2006/relationships" xmlns:p="http://schemas.openxmlformats.org/presentationml/2006/main">
   <p:cSld>
     <p:spTree>
       <p:nvGrpSpPr>
@@ -13931,7 +14206,14 @@
         <p:cNvGrpSpPr/>
         <p:nvPr/>
       </p:nvGrpSpPr>
-      <p:grpSpPr/>
+      <p:grpSpPr>
+        <a:xfrm>
+          <a:off x="0" y="0"/>
+          <a:ext cx="0" cy="0"/>
+          <a:chOff x="0" y="0"/>
+          <a:chExt cx="0" cy="0"/>
+        </a:xfrm>
+      </p:grpSpPr>
       <p:sp>
         <p:nvSpPr>
           <p:cNvPr id="2" name="Rectangle 1"/>
@@ -13973,6 +14255,7 @@
           <a:lstStyle/>
           <a:p>
             <a:pPr algn="ctr"/>
+            <a:endParaRPr/>
           </a:p>
         </p:txBody>
       </p:sp>
@@ -14166,7 +14449,7 @@
 </file>
 
 <file path=ppt/slides/slide40.xml><?xml version="1.0" encoding="utf-8"?>
-<p:sld xmlns:a="http://schemas.openxmlformats.org/drawingml/2006/main" xmlns:p="http://schemas.openxmlformats.org/presentationml/2006/main" xmlns:r="http://schemas.openxmlformats.org/officeDocument/2006/relationships">
+<p:sld xmlns:a="http://schemas.openxmlformats.org/drawingml/2006/main" xmlns:r="http://schemas.openxmlformats.org/officeDocument/2006/relationships" xmlns:p="http://schemas.openxmlformats.org/presentationml/2006/main">
   <p:cSld>
     <p:spTree>
       <p:nvGrpSpPr>
@@ -14174,7 +14457,14 @@
         <p:cNvGrpSpPr/>
         <p:nvPr/>
       </p:nvGrpSpPr>
-      <p:grpSpPr/>
+      <p:grpSpPr>
+        <a:xfrm>
+          <a:off x="0" y="0"/>
+          <a:ext cx="0" cy="0"/>
+          <a:chOff x="0" y="0"/>
+          <a:chExt cx="0" cy="0"/>
+        </a:xfrm>
+      </p:grpSpPr>
       <p:sp>
         <p:nvSpPr>
           <p:cNvPr id="2" name="Rectangle 1"/>
@@ -14216,6 +14506,7 @@
           <a:lstStyle/>
           <a:p>
             <a:pPr algn="ctr"/>
+            <a:endParaRPr/>
           </a:p>
         </p:txBody>
       </p:sp>
@@ -14409,7 +14700,7 @@
 </file>
 
 <file path=ppt/slides/slide41.xml><?xml version="1.0" encoding="utf-8"?>
-<p:sld xmlns:a="http://schemas.openxmlformats.org/drawingml/2006/main" xmlns:p="http://schemas.openxmlformats.org/presentationml/2006/main" xmlns:r="http://schemas.openxmlformats.org/officeDocument/2006/relationships">
+<p:sld xmlns:a="http://schemas.openxmlformats.org/drawingml/2006/main" xmlns:r="http://schemas.openxmlformats.org/officeDocument/2006/relationships" xmlns:p="http://schemas.openxmlformats.org/presentationml/2006/main">
   <p:cSld>
     <p:spTree>
       <p:nvGrpSpPr>
@@ -14417,7 +14708,14 @@
         <p:cNvGrpSpPr/>
         <p:nvPr/>
       </p:nvGrpSpPr>
-      <p:grpSpPr/>
+      <p:grpSpPr>
+        <a:xfrm>
+          <a:off x="0" y="0"/>
+          <a:ext cx="0" cy="0"/>
+          <a:chOff x="0" y="0"/>
+          <a:chExt cx="0" cy="0"/>
+        </a:xfrm>
+      </p:grpSpPr>
       <p:sp>
         <p:nvSpPr>
           <p:cNvPr id="2" name="Rectangle 1"/>
@@ -14459,6 +14757,7 @@
           <a:lstStyle/>
           <a:p>
             <a:pPr algn="ctr"/>
+            <a:endParaRPr/>
           </a:p>
         </p:txBody>
       </p:sp>
@@ -14581,6 +14880,7 @@
           <a:lstStyle/>
           <a:p>
             <a:pPr algn="ctr"/>
+            <a:endParaRPr/>
           </a:p>
         </p:txBody>
       </p:sp>
@@ -14648,7 +14948,7 @@
 </file>
 
 <file path=ppt/slides/slide42.xml><?xml version="1.0" encoding="utf-8"?>
-<p:sld xmlns:a="http://schemas.openxmlformats.org/drawingml/2006/main" xmlns:p="http://schemas.openxmlformats.org/presentationml/2006/main" xmlns:r="http://schemas.openxmlformats.org/officeDocument/2006/relationships">
+<p:sld xmlns:a="http://schemas.openxmlformats.org/drawingml/2006/main" xmlns:r="http://schemas.openxmlformats.org/officeDocument/2006/relationships" xmlns:p="http://schemas.openxmlformats.org/presentationml/2006/main">
   <p:cSld>
     <p:spTree>
       <p:nvGrpSpPr>
@@ -14656,7 +14956,14 @@
         <p:cNvGrpSpPr/>
         <p:nvPr/>
       </p:nvGrpSpPr>
-      <p:grpSpPr/>
+      <p:grpSpPr>
+        <a:xfrm>
+          <a:off x="0" y="0"/>
+          <a:ext cx="0" cy="0"/>
+          <a:chOff x="0" y="0"/>
+          <a:chExt cx="0" cy="0"/>
+        </a:xfrm>
+      </p:grpSpPr>
       <p:sp>
         <p:nvSpPr>
           <p:cNvPr id="2" name="Rectangle 1"/>
@@ -14698,6 +15005,7 @@
           <a:lstStyle/>
           <a:p>
             <a:pPr algn="ctr"/>
+            <a:endParaRPr/>
           </a:p>
         </p:txBody>
       </p:sp>
@@ -14891,7 +15199,7 @@
 </file>
 
 <file path=ppt/slides/slide43.xml><?xml version="1.0" encoding="utf-8"?>
-<p:sld xmlns:a="http://schemas.openxmlformats.org/drawingml/2006/main" xmlns:p="http://schemas.openxmlformats.org/presentationml/2006/main" xmlns:r="http://schemas.openxmlformats.org/officeDocument/2006/relationships">
+<p:sld xmlns:a="http://schemas.openxmlformats.org/drawingml/2006/main" xmlns:r="http://schemas.openxmlformats.org/officeDocument/2006/relationships" xmlns:p="http://schemas.openxmlformats.org/presentationml/2006/main">
   <p:cSld>
     <p:spTree>
       <p:nvGrpSpPr>
@@ -14899,7 +15207,14 @@
         <p:cNvGrpSpPr/>
         <p:nvPr/>
       </p:nvGrpSpPr>
-      <p:grpSpPr/>
+      <p:grpSpPr>
+        <a:xfrm>
+          <a:off x="0" y="0"/>
+          <a:ext cx="0" cy="0"/>
+          <a:chOff x="0" y="0"/>
+          <a:chExt cx="0" cy="0"/>
+        </a:xfrm>
+      </p:grpSpPr>
       <p:sp>
         <p:nvSpPr>
           <p:cNvPr id="2" name="Rectangle 1"/>
@@ -14941,6 +15256,7 @@
           <a:lstStyle/>
           <a:p>
             <a:pPr algn="ctr"/>
+            <a:endParaRPr/>
           </a:p>
         </p:txBody>
       </p:sp>
@@ -15134,7 +15450,7 @@
 </file>
 
 <file path=ppt/slides/slide44.xml><?xml version="1.0" encoding="utf-8"?>
-<p:sld xmlns:a="http://schemas.openxmlformats.org/drawingml/2006/main" xmlns:p="http://schemas.openxmlformats.org/presentationml/2006/main" xmlns:r="http://schemas.openxmlformats.org/officeDocument/2006/relationships">
+<p:sld xmlns:a="http://schemas.openxmlformats.org/drawingml/2006/main" xmlns:r="http://schemas.openxmlformats.org/officeDocument/2006/relationships" xmlns:p="http://schemas.openxmlformats.org/presentationml/2006/main">
   <p:cSld>
     <p:spTree>
       <p:nvGrpSpPr>
@@ -15142,7 +15458,14 @@
         <p:cNvGrpSpPr/>
         <p:nvPr/>
       </p:nvGrpSpPr>
-      <p:grpSpPr/>
+      <p:grpSpPr>
+        <a:xfrm>
+          <a:off x="0" y="0"/>
+          <a:ext cx="0" cy="0"/>
+          <a:chOff x="0" y="0"/>
+          <a:chExt cx="0" cy="0"/>
+        </a:xfrm>
+      </p:grpSpPr>
       <p:sp>
         <p:nvSpPr>
           <p:cNvPr id="2" name="Rectangle 1"/>
@@ -15184,6 +15507,7 @@
           <a:lstStyle/>
           <a:p>
             <a:pPr algn="ctr"/>
+            <a:endParaRPr/>
           </a:p>
         </p:txBody>
       </p:sp>
@@ -15377,7 +15701,7 @@
 </file>
 
 <file path=ppt/slides/slide45.xml><?xml version="1.0" encoding="utf-8"?>
-<p:sld xmlns:a="http://schemas.openxmlformats.org/drawingml/2006/main" xmlns:p="http://schemas.openxmlformats.org/presentationml/2006/main" xmlns:r="http://schemas.openxmlformats.org/officeDocument/2006/relationships">
+<p:sld xmlns:a="http://schemas.openxmlformats.org/drawingml/2006/main" xmlns:r="http://schemas.openxmlformats.org/officeDocument/2006/relationships" xmlns:p="http://schemas.openxmlformats.org/presentationml/2006/main">
   <p:cSld>
     <p:spTree>
       <p:nvGrpSpPr>
@@ -15385,7 +15709,14 @@
         <p:cNvGrpSpPr/>
         <p:nvPr/>
       </p:nvGrpSpPr>
-      <p:grpSpPr/>
+      <p:grpSpPr>
+        <a:xfrm>
+          <a:off x="0" y="0"/>
+          <a:ext cx="0" cy="0"/>
+          <a:chOff x="0" y="0"/>
+          <a:chExt cx="0" cy="0"/>
+        </a:xfrm>
+      </p:grpSpPr>
       <p:sp>
         <p:nvSpPr>
           <p:cNvPr id="2" name="Rectangle 1"/>
@@ -15427,6 +15758,7 @@
           <a:lstStyle/>
           <a:p>
             <a:pPr algn="ctr"/>
+            <a:endParaRPr/>
           </a:p>
         </p:txBody>
       </p:sp>
@@ -15620,7 +15952,7 @@
 </file>
 
 <file path=ppt/slides/slide5.xml><?xml version="1.0" encoding="utf-8"?>
-<p:sld xmlns:a="http://schemas.openxmlformats.org/drawingml/2006/main" xmlns:p="http://schemas.openxmlformats.org/presentationml/2006/main" xmlns:r="http://schemas.openxmlformats.org/officeDocument/2006/relationships">
+<p:sld xmlns:a="http://schemas.openxmlformats.org/drawingml/2006/main" xmlns:r="http://schemas.openxmlformats.org/officeDocument/2006/relationships" xmlns:p="http://schemas.openxmlformats.org/presentationml/2006/main">
   <p:cSld>
     <p:spTree>
       <p:nvGrpSpPr>
@@ -15628,7 +15960,14 @@
         <p:cNvGrpSpPr/>
         <p:nvPr/>
       </p:nvGrpSpPr>
-      <p:grpSpPr/>
+      <p:grpSpPr>
+        <a:xfrm>
+          <a:off x="0" y="0"/>
+          <a:ext cx="0" cy="0"/>
+          <a:chOff x="0" y="0"/>
+          <a:chExt cx="0" cy="0"/>
+        </a:xfrm>
+      </p:grpSpPr>
       <p:sp>
         <p:nvSpPr>
           <p:cNvPr id="2" name="Rectangle 1"/>
@@ -15670,6 +16009,7 @@
           <a:lstStyle/>
           <a:p>
             <a:pPr algn="ctr"/>
+            <a:endParaRPr/>
           </a:p>
         </p:txBody>
       </p:sp>
@@ -15792,6 +16132,7 @@
           <a:lstStyle/>
           <a:p>
             <a:pPr algn="ctr"/>
+            <a:endParaRPr/>
           </a:p>
         </p:txBody>
       </p:sp>
@@ -15875,7 +16216,7 @@
 </file>
 
 <file path=ppt/slides/slide6.xml><?xml version="1.0" encoding="utf-8"?>
-<p:sld xmlns:a="http://schemas.openxmlformats.org/drawingml/2006/main" xmlns:p="http://schemas.openxmlformats.org/presentationml/2006/main" xmlns:r="http://schemas.openxmlformats.org/officeDocument/2006/relationships">
+<p:sld xmlns:a="http://schemas.openxmlformats.org/drawingml/2006/main" xmlns:r="http://schemas.openxmlformats.org/officeDocument/2006/relationships" xmlns:p="http://schemas.openxmlformats.org/presentationml/2006/main">
   <p:cSld>
     <p:spTree>
       <p:nvGrpSpPr>
@@ -15883,7 +16224,14 @@
         <p:cNvGrpSpPr/>
         <p:nvPr/>
       </p:nvGrpSpPr>
-      <p:grpSpPr/>
+      <p:grpSpPr>
+        <a:xfrm>
+          <a:off x="0" y="0"/>
+          <a:ext cx="0" cy="0"/>
+          <a:chOff x="0" y="0"/>
+          <a:chExt cx="0" cy="0"/>
+        </a:xfrm>
+      </p:grpSpPr>
       <p:sp>
         <p:nvSpPr>
           <p:cNvPr id="2" name="Rectangle 1"/>
@@ -15925,6 +16273,7 @@
           <a:lstStyle/>
           <a:p>
             <a:pPr algn="ctr"/>
+            <a:endParaRPr/>
           </a:p>
         </p:txBody>
       </p:sp>
@@ -16118,7 +16467,7 @@
 </file>
 
 <file path=ppt/slides/slide7.xml><?xml version="1.0" encoding="utf-8"?>
-<p:sld xmlns:a="http://schemas.openxmlformats.org/drawingml/2006/main" xmlns:p="http://schemas.openxmlformats.org/presentationml/2006/main" xmlns:r="http://schemas.openxmlformats.org/officeDocument/2006/relationships">
+<p:sld xmlns:a="http://schemas.openxmlformats.org/drawingml/2006/main" xmlns:r="http://schemas.openxmlformats.org/officeDocument/2006/relationships" xmlns:p="http://schemas.openxmlformats.org/presentationml/2006/main">
   <p:cSld>
     <p:spTree>
       <p:nvGrpSpPr>
@@ -16126,7 +16475,14 @@
         <p:cNvGrpSpPr/>
         <p:nvPr/>
       </p:nvGrpSpPr>
-      <p:grpSpPr/>
+      <p:grpSpPr>
+        <a:xfrm>
+          <a:off x="0" y="0"/>
+          <a:ext cx="0" cy="0"/>
+          <a:chOff x="0" y="0"/>
+          <a:chExt cx="0" cy="0"/>
+        </a:xfrm>
+      </p:grpSpPr>
       <p:sp>
         <p:nvSpPr>
           <p:cNvPr id="2" name="Rectangle 1"/>
@@ -16168,6 +16524,7 @@
           <a:lstStyle/>
           <a:p>
             <a:pPr algn="ctr"/>
+            <a:endParaRPr/>
           </a:p>
         </p:txBody>
       </p:sp>
@@ -16361,7 +16718,7 @@
 </file>
 
 <file path=ppt/slides/slide8.xml><?xml version="1.0" encoding="utf-8"?>
-<p:sld xmlns:a="http://schemas.openxmlformats.org/drawingml/2006/main" xmlns:p="http://schemas.openxmlformats.org/presentationml/2006/main" xmlns:r="http://schemas.openxmlformats.org/officeDocument/2006/relationships">
+<p:sld xmlns:a="http://schemas.openxmlformats.org/drawingml/2006/main" xmlns:r="http://schemas.openxmlformats.org/officeDocument/2006/relationships" xmlns:p="http://schemas.openxmlformats.org/presentationml/2006/main">
   <p:cSld>
     <p:spTree>
       <p:nvGrpSpPr>
@@ -16369,7 +16726,14 @@
         <p:cNvGrpSpPr/>
         <p:nvPr/>
       </p:nvGrpSpPr>
-      <p:grpSpPr/>
+      <p:grpSpPr>
+        <a:xfrm>
+          <a:off x="0" y="0"/>
+          <a:ext cx="0" cy="0"/>
+          <a:chOff x="0" y="0"/>
+          <a:chExt cx="0" cy="0"/>
+        </a:xfrm>
+      </p:grpSpPr>
       <p:sp>
         <p:nvSpPr>
           <p:cNvPr id="2" name="Rectangle 1"/>
@@ -16411,6 +16775,7 @@
           <a:lstStyle/>
           <a:p>
             <a:pPr algn="ctr"/>
+            <a:endParaRPr/>
           </a:p>
         </p:txBody>
       </p:sp>
@@ -16604,7 +16969,7 @@
 </file>
 
 <file path=ppt/slides/slide9.xml><?xml version="1.0" encoding="utf-8"?>
-<p:sld xmlns:a="http://schemas.openxmlformats.org/drawingml/2006/main" xmlns:p="http://schemas.openxmlformats.org/presentationml/2006/main" xmlns:r="http://schemas.openxmlformats.org/officeDocument/2006/relationships">
+<p:sld xmlns:a="http://schemas.openxmlformats.org/drawingml/2006/main" xmlns:r="http://schemas.openxmlformats.org/officeDocument/2006/relationships" xmlns:p="http://schemas.openxmlformats.org/presentationml/2006/main">
   <p:cSld>
     <p:spTree>
       <p:nvGrpSpPr>
@@ -16612,7 +16977,14 @@
         <p:cNvGrpSpPr/>
         <p:nvPr/>
       </p:nvGrpSpPr>
-      <p:grpSpPr/>
+      <p:grpSpPr>
+        <a:xfrm>
+          <a:off x="0" y="0"/>
+          <a:ext cx="0" cy="0"/>
+          <a:chOff x="0" y="0"/>
+          <a:chExt cx="0" cy="0"/>
+        </a:xfrm>
+      </p:grpSpPr>
       <p:sp>
         <p:nvSpPr>
           <p:cNvPr id="2" name="Rectangle 1"/>
@@ -16654,6 +17026,7 @@
           <a:lstStyle/>
           <a:p>
             <a:pPr algn="ctr"/>
+            <a:endParaRPr/>
           </a:p>
         </p:txBody>
       </p:sp>
@@ -16776,6 +17149,7 @@
           <a:lstStyle/>
           <a:p>
             <a:pPr algn="ctr"/>
+            <a:endParaRPr/>
           </a:p>
         </p:txBody>
       </p:sp>
@@ -17179,7 +17553,7 @@
 </file>
 
 <file path=ppt/theme/theme2.xml><?xml version="1.0" encoding="utf-8"?>
-<a:theme xmlns:a="http://schemas.openxmlformats.org/drawingml/2006/main" name="Office Theme">
+<a:theme xmlns:a="http://schemas.openxmlformats.org/drawingml/2006/main" name="Office 테마">
   <a:themeElements>
     <a:clrScheme name="Office">
       <a:dk1>
@@ -17189,44 +17563,44 @@
         <a:sysClr val="window" lastClr="FFFFFF"/>
       </a:lt1>
       <a:dk2>
-        <a:srgbClr val="1F497D"/>
+        <a:srgbClr val="0E2841"/>
       </a:dk2>
       <a:lt2>
-        <a:srgbClr val="EEECE1"/>
+        <a:srgbClr val="E8E8E8"/>
       </a:lt2>
       <a:accent1>
-        <a:srgbClr val="4F81BD"/>
+        <a:srgbClr val="156082"/>
       </a:accent1>
       <a:accent2>
-        <a:srgbClr val="C0504D"/>
+        <a:srgbClr val="E97132"/>
       </a:accent2>
       <a:accent3>
-        <a:srgbClr val="9BBB59"/>
+        <a:srgbClr val="196B24"/>
       </a:accent3>
       <a:accent4>
-        <a:srgbClr val="8064A2"/>
+        <a:srgbClr val="0F9ED5"/>
       </a:accent4>
       <a:accent5>
-        <a:srgbClr val="4BACC6"/>
+        <a:srgbClr val="A02B93"/>
       </a:accent5>
       <a:accent6>
-        <a:srgbClr val="F79646"/>
+        <a:srgbClr val="4EA72E"/>
       </a:accent6>
       <a:hlink>
-        <a:srgbClr val="0000FF"/>
+        <a:srgbClr val="467886"/>
       </a:hlink>
       <a:folHlink>
-        <a:srgbClr val="800080"/>
+        <a:srgbClr val="96607D"/>
       </a:folHlink>
     </a:clrScheme>
     <a:fontScheme name="Office">
       <a:majorFont>
-        <a:latin typeface="Calibri"/>
+        <a:latin typeface="맑은 고딕" panose="02110004020202020204"/>
         <a:ea typeface=""/>
         <a:cs typeface=""/>
-        <a:font script="Jpan" typeface="ＭＳ Ｐゴシック"/>
+        <a:font script="Jpan" typeface="游ゴシック Light"/>
         <a:font script="Hang" typeface="맑은 고딕"/>
-        <a:font script="Hans" typeface="宋体"/>
+        <a:font script="Hans" typeface="等线 Light"/>
         <a:font script="Hant" typeface="新細明體"/>
         <a:font script="Arab" typeface="Times New Roman"/>
         <a:font script="Hebr" typeface="Times New Roman"/>
@@ -17254,14 +17628,31 @@
         <a:font script="Viet" typeface="Times New Roman"/>
         <a:font script="Uigh" typeface="Microsoft Uighur"/>
         <a:font script="Geor" typeface="Sylfaen"/>
+        <a:font script="Armn" typeface="Arial"/>
+        <a:font script="Bugi" typeface="Leelawadee UI"/>
+        <a:font script="Bopo" typeface="Microsoft JhengHei"/>
+        <a:font script="Java" typeface="Javanese Text"/>
+        <a:font script="Lisu" typeface="Segoe UI"/>
+        <a:font script="Mymr" typeface="Myanmar Text"/>
+        <a:font script="Nkoo" typeface="Ebrima"/>
+        <a:font script="Olck" typeface="Nirmala UI"/>
+        <a:font script="Osma" typeface="Ebrima"/>
+        <a:font script="Phag" typeface="Phagspa"/>
+        <a:font script="Syrn" typeface="Estrangelo Edessa"/>
+        <a:font script="Syrj" typeface="Estrangelo Edessa"/>
+        <a:font script="Syre" typeface="Estrangelo Edessa"/>
+        <a:font script="Sora" typeface="Nirmala UI"/>
+        <a:font script="Tale" typeface="Microsoft Tai Le"/>
+        <a:font script="Talu" typeface="Microsoft New Tai Lue"/>
+        <a:font script="Tfng" typeface="Ebrima"/>
       </a:majorFont>
       <a:minorFont>
-        <a:latin typeface="Calibri"/>
+        <a:latin typeface="맑은 고딕" panose="02110004020202020204"/>
         <a:ea typeface=""/>
         <a:cs typeface=""/>
-        <a:font script="Jpan" typeface="ＭＳ Ｐゴシック"/>
+        <a:font script="Jpan" typeface="游ゴシック"/>
         <a:font script="Hang" typeface="맑은 고딕"/>
-        <a:font script="Hans" typeface="宋体"/>
+        <a:font script="Hans" typeface="等线"/>
         <a:font script="Hant" typeface="新細明體"/>
         <a:font script="Arab" typeface="Arial"/>
         <a:font script="Hebr" typeface="Arial"/>
@@ -17289,6 +17680,23 @@
         <a:font script="Viet" typeface="Arial"/>
         <a:font script="Uigh" typeface="Microsoft Uighur"/>
         <a:font script="Geor" typeface="Sylfaen"/>
+        <a:font script="Armn" typeface="Arial"/>
+        <a:font script="Bugi" typeface="Leelawadee UI"/>
+        <a:font script="Bopo" typeface="Microsoft JhengHei"/>
+        <a:font script="Java" typeface="Javanese Text"/>
+        <a:font script="Lisu" typeface="Segoe UI"/>
+        <a:font script="Mymr" typeface="Myanmar Text"/>
+        <a:font script="Nkoo" typeface="Ebrima"/>
+        <a:font script="Olck" typeface="Nirmala UI"/>
+        <a:font script="Osma" typeface="Ebrima"/>
+        <a:font script="Phag" typeface="Phagspa"/>
+        <a:font script="Syrn" typeface="Estrangelo Edessa"/>
+        <a:font script="Syrj" typeface="Estrangelo Edessa"/>
+        <a:font script="Syre" typeface="Estrangelo Edessa"/>
+        <a:font script="Sora" typeface="Nirmala UI"/>
+        <a:font script="Tale" typeface="Microsoft Tai Le"/>
+        <a:font script="Talu" typeface="Microsoft New Tai Lue"/>
+        <a:font script="Tfng" typeface="Ebrima"/>
       </a:minorFont>
     </a:fontScheme>
     <a:fmtScheme name="Office">
@@ -17300,180 +17708,136 @@
           <a:gsLst>
             <a:gs pos="0">
               <a:schemeClr val="phClr">
-                <a:tint val="50000"/>
-                <a:satMod val="300000"/>
+                <a:lumMod val="110000"/>
+                <a:satMod val="105000"/>
+                <a:tint val="67000"/>
               </a:schemeClr>
             </a:gs>
-            <a:gs pos="35000">
+            <a:gs pos="50000">
               <a:schemeClr val="phClr">
-                <a:tint val="37000"/>
-                <a:satMod val="300000"/>
+                <a:lumMod val="105000"/>
+                <a:satMod val="103000"/>
+                <a:tint val="73000"/>
               </a:schemeClr>
             </a:gs>
             <a:gs pos="100000">
               <a:schemeClr val="phClr">
-                <a:tint val="15000"/>
-                <a:satMod val="350000"/>
+                <a:lumMod val="105000"/>
+                <a:satMod val="109000"/>
+                <a:tint val="81000"/>
               </a:schemeClr>
             </a:gs>
           </a:gsLst>
-          <a:lin ang="16200000" scaled="1"/>
+          <a:lin ang="5400000" scaled="0"/>
         </a:gradFill>
         <a:gradFill rotWithShape="1">
           <a:gsLst>
             <a:gs pos="0">
               <a:schemeClr val="phClr">
-                <a:tint val="100000"/>
+                <a:satMod val="103000"/>
+                <a:lumMod val="102000"/>
+                <a:tint val="94000"/>
+              </a:schemeClr>
+            </a:gs>
+            <a:gs pos="50000">
+              <a:schemeClr val="phClr">
+                <a:satMod val="110000"/>
+                <a:lumMod val="100000"/>
                 <a:shade val="100000"/>
-                <a:satMod val="130000"/>
               </a:schemeClr>
             </a:gs>
             <a:gs pos="100000">
               <a:schemeClr val="phClr">
-                <a:tint val="50000"/>
-                <a:shade val="100000"/>
-                <a:satMod val="350000"/>
+                <a:lumMod val="99000"/>
+                <a:satMod val="120000"/>
+                <a:shade val="78000"/>
               </a:schemeClr>
             </a:gs>
           </a:gsLst>
-          <a:lin ang="16200000" scaled="0"/>
+          <a:lin ang="5400000" scaled="0"/>
         </a:gradFill>
       </a:fillStyleLst>
       <a:lnStyleLst>
-        <a:ln w="9525" cap="flat" cmpd="sng" algn="ctr">
+        <a:ln w="12700" cap="flat" cmpd="sng" algn="ctr">
           <a:solidFill>
-            <a:schemeClr val="phClr">
-              <a:shade val="95000"/>
-              <a:satMod val="105000"/>
-            </a:schemeClr>
+            <a:schemeClr val="phClr"/>
           </a:solidFill>
           <a:prstDash val="solid"/>
+          <a:miter lim="800000"/>
+        </a:ln>
+        <a:ln w="19050" cap="flat" cmpd="sng" algn="ctr">
+          <a:solidFill>
+            <a:schemeClr val="phClr"/>
+          </a:solidFill>
+          <a:prstDash val="solid"/>
+          <a:miter lim="800000"/>
         </a:ln>
         <a:ln w="25400" cap="flat" cmpd="sng" algn="ctr">
           <a:solidFill>
             <a:schemeClr val="phClr"/>
           </a:solidFill>
           <a:prstDash val="solid"/>
-        </a:ln>
-        <a:ln w="38100" cap="flat" cmpd="sng" algn="ctr">
-          <a:solidFill>
-            <a:schemeClr val="phClr"/>
-          </a:solidFill>
-          <a:prstDash val="solid"/>
+          <a:miter lim="800000"/>
         </a:ln>
       </a:lnStyleLst>
       <a:effectStyleLst>
         <a:effectStyle>
+          <a:effectLst/>
+        </a:effectStyle>
+        <a:effectStyle>
+          <a:effectLst/>
+        </a:effectStyle>
+        <a:effectStyle>
           <a:effectLst>
-            <a:outerShdw blurRad="40000" dist="20000" dir="5400000" rotWithShape="0">
+            <a:outerShdw blurRad="57150" dist="19050" dir="5400000" algn="ctr" rotWithShape="0">
               <a:srgbClr val="000000">
-                <a:alpha val="38000"/>
+                <a:alpha val="63000"/>
               </a:srgbClr>
             </a:outerShdw>
           </a:effectLst>
-        </a:effectStyle>
-        <a:effectStyle>
-          <a:effectLst>
-            <a:outerShdw blurRad="40000" dist="23000" dir="5400000" rotWithShape="0">
-              <a:srgbClr val="000000">
-                <a:alpha val="35000"/>
-              </a:srgbClr>
-            </a:outerShdw>
-          </a:effectLst>
-        </a:effectStyle>
-        <a:effectStyle>
-          <a:effectLst>
-            <a:outerShdw blurRad="40000" dist="23000" dir="5400000" rotWithShape="0">
-              <a:srgbClr val="000000">
-                <a:alpha val="35000"/>
-              </a:srgbClr>
-            </a:outerShdw>
-          </a:effectLst>
-          <a:scene3d>
-            <a:camera prst="orthographicFront">
-              <a:rot lat="0" lon="0" rev="0"/>
-            </a:camera>
-            <a:lightRig rig="threePt" dir="t">
-              <a:rot lat="0" lon="0" rev="1200000"/>
-            </a:lightRig>
-          </a:scene3d>
-          <a:sp3d>
-            <a:bevelT w="63500" h="25400"/>
-          </a:sp3d>
         </a:effectStyle>
       </a:effectStyleLst>
       <a:bgFillStyleLst>
         <a:solidFill>
           <a:schemeClr val="phClr"/>
         </a:solidFill>
+        <a:solidFill>
+          <a:schemeClr val="phClr">
+            <a:tint val="95000"/>
+            <a:satMod val="170000"/>
+          </a:schemeClr>
+        </a:solidFill>
         <a:gradFill rotWithShape="1">
           <a:gsLst>
             <a:gs pos="0">
               <a:schemeClr val="phClr">
-                <a:tint val="40000"/>
-                <a:satMod val="350000"/>
+                <a:tint val="93000"/>
+                <a:satMod val="150000"/>
+                <a:shade val="98000"/>
+                <a:lumMod val="102000"/>
               </a:schemeClr>
             </a:gs>
-            <a:gs pos="40000">
+            <a:gs pos="50000">
               <a:schemeClr val="phClr">
-                <a:tint val="45000"/>
-                <a:shade val="99000"/>
-                <a:satMod val="350000"/>
+                <a:tint val="98000"/>
+                <a:satMod val="130000"/>
+                <a:shade val="90000"/>
+                <a:lumMod val="103000"/>
               </a:schemeClr>
             </a:gs>
             <a:gs pos="100000">
               <a:schemeClr val="phClr">
-                <a:shade val="20000"/>
-                <a:satMod val="255000"/>
+                <a:shade val="63000"/>
+                <a:satMod val="120000"/>
               </a:schemeClr>
             </a:gs>
           </a:gsLst>
-          <a:path path="circle">
-            <a:fillToRect l="50000" t="-80000" r="50000" b="180000"/>
-          </a:path>
-        </a:gradFill>
-        <a:gradFill rotWithShape="1">
-          <a:gsLst>
-            <a:gs pos="0">
-              <a:schemeClr val="phClr">
-                <a:tint val="80000"/>
-                <a:satMod val="300000"/>
-              </a:schemeClr>
-            </a:gs>
-            <a:gs pos="100000">
-              <a:schemeClr val="phClr">
-                <a:shade val="30000"/>
-                <a:satMod val="200000"/>
-              </a:schemeClr>
-            </a:gs>
-          </a:gsLst>
-          <a:path path="circle">
-            <a:fillToRect l="50000" t="50000" r="50000" b="50000"/>
-          </a:path>
+          <a:lin ang="5400000" scaled="0"/>
         </a:gradFill>
       </a:bgFillStyleLst>
     </a:fmtScheme>
   </a:themeElements>
   <a:objectDefaults>
-    <a:spDef>
-      <a:spPr/>
-      <a:bodyPr/>
-      <a:lstStyle/>
-      <a:style>
-        <a:lnRef idx="1">
-          <a:schemeClr val="accent1"/>
-        </a:lnRef>
-        <a:fillRef idx="3">
-          <a:schemeClr val="accent1"/>
-        </a:fillRef>
-        <a:effectRef idx="2">
-          <a:schemeClr val="accent1"/>
-        </a:effectRef>
-        <a:fontRef idx="minor">
-          <a:schemeClr val="lt1"/>
-        </a:fontRef>
-      </a:style>
-    </a:spDef>
     <a:lnDef>
       <a:spPr/>
       <a:bodyPr/>
@@ -17495,5 +17859,10 @@
     </a:lnDef>
   </a:objectDefaults>
   <a:extraClrSchemeLst/>
+  <a:extLst>
+    <a:ext uri="{05A4C25C-085E-4340-85A3-A5531E510DB2}">
+      <thm15:themeFamily xmlns:thm15="http://schemas.microsoft.com/office/thememl/2012/main" name="Office Theme" id="{2E142A2C-CD16-42D6-873A-C26D2A0506FA}" vid="{1BDDFF52-6CD6-40A5-AB3C-68EB2F1E4D0A}"/>
+    </a:ext>
+  </a:extLst>
 </a:theme>
 </file>